--- a/Sem 4/OS/SDC_3.1_IPC.pptx
+++ b/Sem 4/OS/SDC_3.1_IPC.pptx
@@ -421,7 +421,7 @@
           <a:p>
             <a:fld id="{93756191-954F-4CAE-976B-C2C3B2E406EE}" type="datetimeFigureOut">
               <a:rPr lang="en-IN" smtClean="0"/>
-              <a:t>23-04-2025</a:t>
+              <a:t>26-04-2025</a:t>
             </a:fld>
             <a:endParaRPr lang="en-IN"/>
           </a:p>
@@ -4970,7 +4970,7 @@
           <a:p>
             <a:fld id="{968CC5C3-C485-4FEC-9ABB-4E00E3F5A74F}" type="datetime1">
               <a:rPr lang="en-IN" smtClean="0"/>
-              <a:t>23-04-2025</a:t>
+              <a:t>26-04-2025</a:t>
             </a:fld>
             <a:endParaRPr lang="en-IN"/>
           </a:p>
@@ -5143,7 +5143,7 @@
           <a:p>
             <a:fld id="{C0E05370-52BF-42C3-88D8-E982C96844BD}" type="datetime1">
               <a:rPr lang="en-IN" smtClean="0"/>
-              <a:t>23-04-2025</a:t>
+              <a:t>26-04-2025</a:t>
             </a:fld>
             <a:endParaRPr lang="en-IN"/>
           </a:p>
@@ -5326,7 +5326,7 @@
           <a:p>
             <a:fld id="{457189EF-A0DE-45E0-B9D0-850CDD6EACD1}" type="datetime1">
               <a:rPr lang="en-IN" smtClean="0"/>
-              <a:t>23-04-2025</a:t>
+              <a:t>26-04-2025</a:t>
             </a:fld>
             <a:endParaRPr lang="en-IN"/>
           </a:p>
@@ -5499,7 +5499,7 @@
           <a:p>
             <a:fld id="{FDC4E822-3F60-4AF5-A2C7-5CC07F953596}" type="datetime1">
               <a:rPr lang="en-IN" smtClean="0"/>
-              <a:t>23-04-2025</a:t>
+              <a:t>26-04-2025</a:t>
             </a:fld>
             <a:endParaRPr lang="en-IN"/>
           </a:p>
@@ -5748,7 +5748,7 @@
           <a:p>
             <a:fld id="{F007F75B-F604-4770-97EA-4FB9E363E92F}" type="datetime1">
               <a:rPr lang="en-IN" smtClean="0"/>
-              <a:t>23-04-2025</a:t>
+              <a:t>26-04-2025</a:t>
             </a:fld>
             <a:endParaRPr lang="en-IN"/>
           </a:p>
@@ -6039,7 +6039,7 @@
           <a:p>
             <a:fld id="{EFBEC78D-076C-4549-9599-0A841FAF557C}" type="datetime1">
               <a:rPr lang="en-IN" smtClean="0"/>
-              <a:t>23-04-2025</a:t>
+              <a:t>26-04-2025</a:t>
             </a:fld>
             <a:endParaRPr lang="en-IN"/>
           </a:p>
@@ -6464,7 +6464,7 @@
           <a:p>
             <a:fld id="{67276CCF-8F4E-4D5E-80D3-F6B1FBCECFA8}" type="datetime1">
               <a:rPr lang="en-IN" smtClean="0"/>
-              <a:t>23-04-2025</a:t>
+              <a:t>26-04-2025</a:t>
             </a:fld>
             <a:endParaRPr lang="en-IN"/>
           </a:p>
@@ -6585,7 +6585,7 @@
           <a:p>
             <a:fld id="{F93EBDCD-C353-464D-82BE-7ACA709EFAA1}" type="datetime1">
               <a:rPr lang="en-IN" smtClean="0"/>
-              <a:t>23-04-2025</a:t>
+              <a:t>26-04-2025</a:t>
             </a:fld>
             <a:endParaRPr lang="en-IN"/>
           </a:p>
@@ -6683,7 +6683,7 @@
           <a:p>
             <a:fld id="{EA6FA480-F1C4-4D98-A093-7342E3A9D14C}" type="datetime1">
               <a:rPr lang="en-IN" smtClean="0"/>
-              <a:t>23-04-2025</a:t>
+              <a:t>26-04-2025</a:t>
             </a:fld>
             <a:endParaRPr lang="en-IN"/>
           </a:p>
@@ -6963,7 +6963,7 @@
           <a:p>
             <a:fld id="{3E1D840F-665C-4D62-B6F8-A82AC705A799}" type="datetime1">
               <a:rPr lang="en-IN" smtClean="0"/>
-              <a:t>23-04-2025</a:t>
+              <a:t>26-04-2025</a:t>
             </a:fld>
             <a:endParaRPr lang="en-IN"/>
           </a:p>
@@ -7219,7 +7219,7 @@
           <a:p>
             <a:fld id="{8CF207F4-C0BB-426F-BAC5-181399BF0C19}" type="datetime1">
               <a:rPr lang="en-IN" smtClean="0"/>
-              <a:t>23-04-2025</a:t>
+              <a:t>26-04-2025</a:t>
             </a:fld>
             <a:endParaRPr lang="en-IN"/>
           </a:p>
@@ -7435,7 +7435,7 @@
           <a:p>
             <a:fld id="{25310AE1-C54E-4167-9DEA-09DFF1386CF5}" type="datetime1">
               <a:rPr lang="en-IN" smtClean="0"/>
-              <a:t>23-04-2025</a:t>
+              <a:t>26-04-2025</a:t>
             </a:fld>
             <a:endParaRPr lang="en-IN"/>
           </a:p>
@@ -7875,7 +7875,7 @@
           <a:p>
             <a:fld id="{0BAA00E1-0F93-4DCD-A175-135A473E9809}" type="datetime1">
               <a:rPr lang="en-IN" smtClean="0"/>
-              <a:t>23-04-2025</a:t>
+              <a:t>26-04-2025</a:t>
             </a:fld>
             <a:endParaRPr lang="en-IN"/>
           </a:p>
@@ -8238,7 +8238,7 @@
           <a:p>
             <a:fld id="{E5E1D7CF-510E-4908-A6B6-C010A878E3DD}" type="datetime1">
               <a:rPr lang="en-IN" smtClean="0"/>
-              <a:t>23-04-2025</a:t>
+              <a:t>26-04-2025</a:t>
             </a:fld>
             <a:endParaRPr lang="en-IN"/>
           </a:p>
@@ -8407,7 +8407,7 @@
           <a:p>
             <a:fld id="{352FC8AA-C33C-49A7-B57E-853E51455A7C}" type="datetime1">
               <a:rPr lang="en-IN" smtClean="0"/>
-              <a:t>23-04-2025</a:t>
+              <a:t>26-04-2025</a:t>
             </a:fld>
             <a:endParaRPr lang="en-IN"/>
           </a:p>
@@ -8535,36 +8535,68 @@
           <a:lstStyle/>
           <a:p>
             <a:r>
+              <a:rPr lang="en-IN" sz="2400" dirty="0">
+                <a:highlight>
+                  <a:srgbClr val="FFFF00"/>
+                </a:highlight>
+              </a:rPr>
+              <a:t>Message passing is useful for</a:t>
+            </a:r>
+          </a:p>
+          <a:p>
+            <a:pPr lvl="1"/>
+            <a:r>
+              <a:rPr lang="en-IN" dirty="0">
+                <a:highlight>
+                  <a:srgbClr val="FFFF00"/>
+                </a:highlight>
+              </a:rPr>
+              <a:t> </a:t>
+            </a:r>
+            <a:r>
+              <a:rPr lang="en-IN" b="1" u="sng" dirty="0">
+                <a:highlight>
+                  <a:srgbClr val="FFFF00"/>
+                </a:highlight>
+              </a:rPr>
+              <a:t>exchanging smaller </a:t>
+            </a:r>
+            <a:r>
+              <a:rPr lang="en-IN" dirty="0">
+                <a:highlight>
+                  <a:srgbClr val="FFFF00"/>
+                </a:highlight>
+              </a:rPr>
+              <a:t>amounts of data, </a:t>
+            </a:r>
+          </a:p>
+          <a:p>
+            <a:pPr lvl="1"/>
+            <a:r>
+              <a:rPr lang="en-IN" dirty="0">
+                <a:highlight>
+                  <a:srgbClr val="FFFF00"/>
+                </a:highlight>
+              </a:rPr>
+              <a:t>because no conflicts need be avoided. </a:t>
+            </a:r>
+          </a:p>
+          <a:p>
+            <a:r>
               <a:rPr lang="en-IN" sz="2400" dirty="0"/>
-              <a:t>Message passing is useful for</a:t>
-            </a:r>
-          </a:p>
-          <a:p>
-            <a:pPr lvl="1"/>
-            <a:r>
-              <a:rPr lang="en-IN" dirty="0"/>
-              <a:t> </a:t>
-            </a:r>
-            <a:r>
-              <a:rPr lang="en-IN" b="1" u="sng" dirty="0"/>
-              <a:t>exchanging smaller </a:t>
-            </a:r>
-            <a:r>
-              <a:rPr lang="en-IN" dirty="0"/>
-              <a:t>amounts of data, </a:t>
-            </a:r>
-          </a:p>
-          <a:p>
-            <a:pPr lvl="1"/>
-            <a:r>
-              <a:rPr lang="en-IN" dirty="0"/>
-              <a:t>because no conflicts need be avoided. </a:t>
-            </a:r>
-          </a:p>
-          <a:p>
+              <a:t>Message passing is also </a:t>
+            </a:r>
+            <a:r>
+              <a:rPr lang="en-IN" sz="2400" dirty="0">
+                <a:highlight>
+                  <a:srgbClr val="FFFF00"/>
+                </a:highlight>
+              </a:rPr>
+              <a:t>easier to implement </a:t>
+            </a:r>
             <a:r>
               <a:rPr lang="en-IN" sz="2400" dirty="0"/>
-              <a:t>Message passing is also easier to implement than </a:t>
+              <a:t>than </a:t>
             </a:r>
           </a:p>
           <a:p>
@@ -8609,18 +8641,34 @@
           <a:p>
             <a:pPr lvl="1"/>
             <a:r>
-              <a:rPr lang="en-IN" b="1" u="sng" dirty="0"/>
+              <a:rPr lang="en-IN" b="1" u="sng" dirty="0">
+                <a:highlight>
+                  <a:srgbClr val="FFFF00"/>
+                </a:highlight>
+              </a:rPr>
               <a:t>maximum speed </a:t>
             </a:r>
             <a:r>
-              <a:rPr lang="en-IN" dirty="0"/>
+              <a:rPr lang="en-IN" dirty="0">
+                <a:highlight>
+                  <a:srgbClr val="FFFF00"/>
+                </a:highlight>
+              </a:rPr>
               <a:t>and convenience of communication</a:t>
             </a:r>
           </a:p>
           <a:p>
             <a:r>
               <a:rPr lang="en-IN" sz="2400" b="1" u="sng" dirty="0"/>
-              <a:t>Shared memory is faster </a:t>
+              <a:t>Shared memory is </a:t>
+            </a:r>
+            <a:r>
+              <a:rPr lang="en-IN" sz="2400" b="1" u="sng" dirty="0">
+                <a:highlight>
+                  <a:srgbClr val="FFFF00"/>
+                </a:highlight>
+              </a:rPr>
+              <a:t>faster </a:t>
             </a:r>
           </a:p>
           <a:p>
@@ -8695,7 +8743,7 @@
           <a:p>
             <a:fld id="{7F5ED191-01CE-4C25-95AC-490644024D37}" type="datetime1">
               <a:rPr lang="en-IN" smtClean="0"/>
-              <a:t>23-04-2025</a:t>
+              <a:t>26-04-2025</a:t>
             </a:fld>
             <a:endParaRPr lang="en-IN"/>
           </a:p>
@@ -8834,14 +8882,22 @@
           <a:p>
             <a:pPr lvl="1"/>
             <a:r>
-              <a:rPr lang="en-IN" b="1" dirty="0"/>
+              <a:rPr lang="en-IN" b="1" dirty="0">
+                <a:highlight>
+                  <a:srgbClr val="FFFF00"/>
+                </a:highlight>
+              </a:rPr>
               <a:t>using system calls and </a:t>
             </a:r>
           </a:p>
           <a:p>
             <a:pPr lvl="1"/>
             <a:r>
-              <a:rPr lang="en-IN" b="1" dirty="0"/>
+              <a:rPr lang="en-IN" b="1" dirty="0">
+                <a:highlight>
+                  <a:srgbClr val="FFFF00"/>
+                </a:highlight>
+              </a:rPr>
               <a:t>thus require the more time-consuming task of kernel intervention.</a:t>
             </a:r>
           </a:p>
@@ -8879,11 +8935,19 @@
           <a:p>
             <a:pPr lvl="1"/>
             <a:r>
-              <a:rPr lang="en-IN" b="1" u="sng" dirty="0"/>
+              <a:rPr lang="en-IN" b="1" u="sng" dirty="0">
+                <a:highlight>
+                  <a:srgbClr val="FFFF00"/>
+                </a:highlight>
+              </a:rPr>
               <a:t>Once shared memory is established</a:t>
             </a:r>
             <a:r>
-              <a:rPr lang="en-IN" dirty="0"/>
+              <a:rPr lang="en-IN" dirty="0">
+                <a:highlight>
+                  <a:srgbClr val="FFFF00"/>
+                </a:highlight>
+              </a:rPr>
               <a:t>, </a:t>
             </a:r>
             <a:r>
@@ -8891,6 +8955,9 @@
                 <a:solidFill>
                   <a:srgbClr val="FF0000"/>
                 </a:solidFill>
+                <a:highlight>
+                  <a:srgbClr val="FFFF00"/>
+                </a:highlight>
               </a:rPr>
               <a:t>all accesses are treated</a:t>
             </a:r>
@@ -8899,6 +8966,9 @@
                 <a:solidFill>
                   <a:srgbClr val="FF0000"/>
                 </a:solidFill>
+                <a:highlight>
+                  <a:srgbClr val="FFFF00"/>
+                </a:highlight>
               </a:rPr>
               <a:t> </a:t>
             </a:r>
@@ -8907,6 +8977,9 @@
                 <a:solidFill>
                   <a:srgbClr val="FF0000"/>
                 </a:solidFill>
+                <a:highlight>
+                  <a:srgbClr val="FFFF00"/>
+                </a:highlight>
               </a:rPr>
               <a:t>as routine memory accesses, </a:t>
             </a:r>
@@ -8914,16 +8987,32 @@
           <a:p>
             <a:pPr lvl="1"/>
             <a:r>
+              <a:rPr lang="en-IN" dirty="0">
+                <a:highlight>
+                  <a:srgbClr val="FFFF00"/>
+                </a:highlight>
+              </a:rPr>
+              <a:t>and </a:t>
+            </a:r>
+            <a:r>
+              <a:rPr lang="en-IN" b="1" u="sng" dirty="0">
+                <a:highlight>
+                  <a:srgbClr val="FFFF00"/>
+                </a:highlight>
+              </a:rPr>
+              <a:t>no assistance from the kernel </a:t>
+            </a:r>
+            <a:r>
+              <a:rPr lang="en-IN" dirty="0">
+                <a:highlight>
+                  <a:srgbClr val="FFFF00"/>
+                </a:highlight>
+              </a:rPr>
+              <a:t>is required</a:t>
+            </a:r>
+            <a:r>
               <a:rPr lang="en-IN" dirty="0"/>
-              <a:t>and </a:t>
-            </a:r>
-            <a:r>
-              <a:rPr lang="en-IN" b="1" u="sng" dirty="0"/>
-              <a:t>no assistance from the kernel </a:t>
-            </a:r>
-            <a:r>
-              <a:rPr lang="en-IN" dirty="0"/>
-              <a:t>is required.</a:t>
+              <a:t>.</a:t>
             </a:r>
           </a:p>
         </p:txBody>
@@ -8991,7 +9080,7 @@
           <a:p>
             <a:fld id="{591DBC1D-025A-4D84-82B8-8EEB2C9043F6}" type="datetime1">
               <a:rPr lang="en-IN" smtClean="0"/>
-              <a:t>23-04-2025</a:t>
+              <a:t>26-04-2025</a:t>
             </a:fld>
             <a:endParaRPr lang="en-IN"/>
           </a:p>
@@ -9184,7 +9273,7 @@
           <a:p>
             <a:fld id="{D835528B-C9A8-4C35-B390-73F45810852B}" type="datetime1">
               <a:rPr lang="en-IN" smtClean="0"/>
-              <a:t>23-04-2025</a:t>
+              <a:t>26-04-2025</a:t>
             </a:fld>
             <a:endParaRPr lang="en-IN"/>
           </a:p>
@@ -9321,7 +9410,11 @@
               <a:buNone/>
             </a:pPr>
             <a:r>
-              <a:rPr lang="en-IN" sz="2400" dirty="0"/>
+              <a:rPr lang="en-IN" sz="2400" dirty="0">
+                <a:highlight>
+                  <a:srgbClr val="FFFF00"/>
+                </a:highlight>
+              </a:rPr>
               <a:t>For example, </a:t>
             </a:r>
           </a:p>
@@ -9331,28 +9424,44 @@
               <a:buAutoNum type="arabicParenR"/>
             </a:pPr>
             <a:r>
-              <a:rPr lang="en-IN" sz="2400" dirty="0"/>
+              <a:rPr lang="en-IN" sz="2400" dirty="0">
+                <a:highlight>
+                  <a:srgbClr val="FFFF00"/>
+                </a:highlight>
+              </a:rPr>
               <a:t>A compiler may produce assembly code, </a:t>
             </a:r>
           </a:p>
           <a:p>
             <a:pPr marL="914400" lvl="1" indent="-514350"/>
             <a:r>
-              <a:rPr lang="en-IN" sz="2400" dirty="0"/>
+              <a:rPr lang="en-IN" sz="2400" dirty="0">
+                <a:highlight>
+                  <a:srgbClr val="FFFF00"/>
+                </a:highlight>
+              </a:rPr>
               <a:t>which is consumed by an assembler.  </a:t>
             </a:r>
           </a:p>
           <a:p>
             <a:pPr marL="857250" lvl="1" indent="-457200"/>
             <a:r>
-              <a:rPr lang="en-IN" sz="2400" dirty="0"/>
+              <a:rPr lang="en-IN" sz="2400" dirty="0">
+                <a:highlight>
+                  <a:srgbClr val="FFFF00"/>
+                </a:highlight>
+              </a:rPr>
               <a:t>The assembler, in turn, can produce object modules, </a:t>
             </a:r>
           </a:p>
           <a:p>
             <a:pPr marL="857250" lvl="1" indent="-457200"/>
             <a:r>
-              <a:rPr lang="en-IN" sz="2400" dirty="0"/>
+              <a:rPr lang="en-IN" sz="2400" dirty="0">
+                <a:highlight>
+                  <a:srgbClr val="FFFF00"/>
+                </a:highlight>
+              </a:rPr>
               <a:t>which are consumed by the loader.</a:t>
             </a:r>
           </a:p>
@@ -9362,24 +9471,40 @@
               <a:buAutoNum type="arabicParenR"/>
             </a:pPr>
             <a:r>
-              <a:rPr lang="en-IN" sz="2400" dirty="0"/>
+              <a:rPr lang="en-IN" sz="2400" dirty="0">
+                <a:highlight>
+                  <a:srgbClr val="FFFF00"/>
+                </a:highlight>
+              </a:rPr>
               <a:t>Server as a producer and a client as   consumer. </a:t>
             </a:r>
           </a:p>
           <a:p>
             <a:pPr marL="914400" lvl="1" indent="-514350"/>
             <a:r>
-              <a:rPr lang="en-IN" sz="2400" dirty="0"/>
+              <a:rPr lang="en-IN" sz="2400" dirty="0">
+                <a:highlight>
+                  <a:srgbClr val="FFFF00"/>
+                </a:highlight>
+              </a:rPr>
               <a:t>For example, a Web server produces (that is, provides) HTML files and images, </a:t>
             </a:r>
           </a:p>
           <a:p>
             <a:pPr marL="914400" lvl="1" indent="-514350"/>
             <a:r>
-              <a:rPr lang="en-IN" sz="2400" dirty="0"/>
+              <a:rPr lang="en-IN" sz="2400" dirty="0">
+                <a:highlight>
+                  <a:srgbClr val="FFFF00"/>
+                </a:highlight>
+              </a:rPr>
               <a:t>which are consumed (that is, read) by the client Web browser requesting the resource.</a:t>
             </a:r>
-            <a:endParaRPr lang="en-US" altLang="en-US" sz="2400" dirty="0"/>
+            <a:endParaRPr lang="en-US" altLang="en-US" sz="2400" dirty="0">
+              <a:highlight>
+                <a:srgbClr val="FFFF00"/>
+              </a:highlight>
+            </a:endParaRPr>
           </a:p>
         </p:txBody>
       </p:sp>
@@ -9400,7 +9525,7 @@
           <a:p>
             <a:fld id="{9C221A06-B693-4C3E-9F33-53709ED06230}" type="datetime1">
               <a:rPr lang="en-IN" smtClean="0"/>
-              <a:t>23-04-2025</a:t>
+              <a:t>26-04-2025</a:t>
             </a:fld>
             <a:endParaRPr lang="en-IN"/>
           </a:p>
@@ -9570,7 +9695,7 @@
           <a:p>
             <a:fld id="{55943199-12AF-4496-8519-AA468441CF15}" type="datetime1">
               <a:rPr lang="en-IN" smtClean="0"/>
-              <a:t>23-04-2025</a:t>
+              <a:t>26-04-2025</a:t>
             </a:fld>
             <a:endParaRPr lang="en-IN"/>
           </a:p>
@@ -9707,16 +9832,12 @@
           </a:p>
           <a:p>
             <a:r>
-              <a:rPr lang="en-IN" sz="2400" dirty="0"/>
-              <a:t>An </a:t>
-            </a:r>
-            <a:r>
-              <a:rPr lang="en-IN" sz="2400"/>
-              <a:t>available  </a:t>
-            </a:r>
-            <a:r>
-              <a:rPr lang="en-IN" sz="2400" dirty="0"/>
-              <a:t>buffer of items that </a:t>
+              <a:rPr lang="en-IN" sz="2400" dirty="0">
+                <a:highlight>
+                  <a:srgbClr val="FFFF00"/>
+                </a:highlight>
+              </a:rPr>
+              <a:t>An available  buffer of items that </a:t>
             </a:r>
           </a:p>
           <a:p>
@@ -9726,6 +9847,9 @@
                 <a:solidFill>
                   <a:schemeClr val="accent1"/>
                 </a:solidFill>
+                <a:highlight>
+                  <a:srgbClr val="FFFF00"/>
+                </a:highlight>
               </a:rPr>
               <a:t>can be filled by the producer and </a:t>
             </a:r>
@@ -9737,26 +9861,45 @@
                 <a:solidFill>
                   <a:schemeClr val="accent1"/>
                 </a:solidFill>
+                <a:highlight>
+                  <a:srgbClr val="FFFF00"/>
+                </a:highlight>
               </a:rPr>
               <a:t>emptied by the consumer. </a:t>
             </a:r>
           </a:p>
           <a:p>
-            <a:endParaRPr lang="en-IN" sz="2400" dirty="0"/>
-          </a:p>
-          <a:p>
-            <a:r>
-              <a:rPr lang="en-IN" sz="2400" dirty="0"/>
+            <a:endParaRPr lang="en-IN" sz="2400" dirty="0">
+              <a:highlight>
+                <a:srgbClr val="FFFF00"/>
+              </a:highlight>
+            </a:endParaRPr>
+          </a:p>
+          <a:p>
+            <a:r>
+              <a:rPr lang="en-IN" sz="2400" dirty="0">
+                <a:highlight>
+                  <a:srgbClr val="FFFF00"/>
+                </a:highlight>
+              </a:rPr>
               <a:t>This buffer will reside in a region of memory </a:t>
             </a:r>
           </a:p>
           <a:p>
             <a:pPr lvl="1"/>
             <a:r>
-              <a:rPr lang="en-IN" sz="2400" dirty="0"/>
+              <a:rPr lang="en-IN" sz="2400" dirty="0">
+                <a:highlight>
+                  <a:srgbClr val="FFFF00"/>
+                </a:highlight>
+              </a:rPr>
               <a:t>that is shared by the producer and consumer processes.</a:t>
             </a:r>
-            <a:endParaRPr lang="en-US" altLang="en-US" sz="2400" dirty="0"/>
+            <a:endParaRPr lang="en-US" altLang="en-US" sz="2400" dirty="0">
+              <a:highlight>
+                <a:srgbClr val="FFFF00"/>
+              </a:highlight>
+            </a:endParaRPr>
           </a:p>
         </p:txBody>
       </p:sp>
@@ -9777,7 +9920,7 @@
           <a:p>
             <a:fld id="{EF20BFE9-FC7F-4BBD-8708-DCECF91F62F2}" type="datetime1">
               <a:rPr lang="en-IN" smtClean="0"/>
-              <a:t>23-04-2025</a:t>
+              <a:t>26-04-2025</a:t>
             </a:fld>
             <a:endParaRPr lang="en-IN"/>
           </a:p>
@@ -9912,12 +10055,24 @@
           <a:p>
             <a:r>
               <a:rPr lang="en-IN" sz="2800" dirty="0"/>
-              <a:t>A producer can produce one item</a:t>
-            </a:r>
-          </a:p>
-          <a:p>
-            <a:r>
-              <a:rPr lang="en-IN" sz="2800" dirty="0"/>
+              <a:t>A producer can </a:t>
+            </a:r>
+            <a:r>
+              <a:rPr lang="en-IN" sz="2800" dirty="0">
+                <a:highlight>
+                  <a:srgbClr val="FFFF00"/>
+                </a:highlight>
+              </a:rPr>
+              <a:t>produce one item</a:t>
+            </a:r>
+          </a:p>
+          <a:p>
+            <a:r>
+              <a:rPr lang="en-IN" sz="2800" dirty="0">
+                <a:highlight>
+                  <a:srgbClr val="FFFF00"/>
+                </a:highlight>
+              </a:rPr>
               <a:t>While the consumer is consuming another item. </a:t>
             </a:r>
           </a:p>
@@ -9992,7 +10147,7 @@
           <a:p>
             <a:fld id="{8E0A70DC-AD5A-4C97-B7EF-214CDC0ED197}" type="datetime1">
               <a:rPr lang="en-IN" smtClean="0"/>
-              <a:t>23-04-2025</a:t>
+              <a:t>26-04-2025</a:t>
             </a:fld>
             <a:endParaRPr lang="en-IN"/>
           </a:p>
@@ -10126,7 +10281,11 @@
           <a:lstStyle/>
           <a:p>
             <a:r>
-              <a:rPr lang="en-IN" sz="2800" b="1" u="sng" dirty="0"/>
+              <a:rPr lang="en-IN" sz="2800" b="1" u="sng" dirty="0">
+                <a:highlight>
+                  <a:srgbClr val="FFFF00"/>
+                </a:highlight>
+              </a:rPr>
               <a:t>The producer and consumer must be synchronized, </a:t>
             </a:r>
           </a:p>
@@ -10164,7 +10323,7 @@
           <a:p>
             <a:fld id="{521718F0-566D-4399-B384-A064FD7CD639}" type="datetime1">
               <a:rPr lang="en-IN" smtClean="0"/>
-              <a:t>23-04-2025</a:t>
+              <a:t>26-04-2025</a:t>
             </a:fld>
             <a:endParaRPr lang="en-IN"/>
           </a:p>
@@ -10342,7 +10501,7 @@
           <a:p>
             <a:fld id="{B0333289-598B-4EBE-995C-1AE49FDDD900}" type="datetime1">
               <a:rPr lang="en-IN" smtClean="0"/>
-              <a:t>23-04-2025</a:t>
+              <a:t>26-04-2025</a:t>
             </a:fld>
             <a:endParaRPr lang="en-IN"/>
           </a:p>
@@ -10531,7 +10690,7 @@
           <a:p>
             <a:fld id="{82A75676-8116-4155-A8FF-D9B134083539}" type="datetime1">
               <a:rPr lang="en-IN" smtClean="0"/>
-              <a:t>23-04-2025</a:t>
+              <a:t>26-04-2025</a:t>
             </a:fld>
             <a:endParaRPr lang="en-IN"/>
           </a:p>
@@ -10684,21 +10843,53 @@
             </a:r>
             <a:r>
               <a:rPr lang="en-US" altLang="en-US" sz="2400" dirty="0"/>
-              <a:t>places no practical limit on the size of the buffer</a:t>
+              <a:t>places </a:t>
+            </a:r>
+            <a:r>
+              <a:rPr lang="en-US" altLang="en-US" sz="2400" dirty="0">
+                <a:highlight>
+                  <a:srgbClr val="FFFF00"/>
+                </a:highlight>
+              </a:rPr>
+              <a:t>no practical limit on the size of the buffer</a:t>
             </a:r>
           </a:p>
           <a:p>
             <a:pPr lvl="1"/>
             <a:r>
               <a:rPr lang="en-IN" sz="2400" dirty="0"/>
-              <a:t>The consumer may have to wait for new items,</a:t>
+              <a:t>The </a:t>
+            </a:r>
+            <a:r>
+              <a:rPr lang="en-IN" sz="2400" dirty="0">
+                <a:highlight>
+                  <a:srgbClr val="FFFF00"/>
+                </a:highlight>
+              </a:rPr>
+              <a:t>consumer may have to wait for new items</a:t>
+            </a:r>
+            <a:r>
+              <a:rPr lang="en-IN" sz="2400" dirty="0"/>
+              <a:t>,</a:t>
             </a:r>
           </a:p>
           <a:p>
             <a:pPr lvl="1"/>
             <a:r>
               <a:rPr lang="en-IN" sz="2400" dirty="0"/>
-              <a:t>but the producer can always produce new items.</a:t>
+              <a:t>but </a:t>
+            </a:r>
+            <a:r>
+              <a:rPr lang="en-IN" sz="2400" dirty="0">
+                <a:highlight>
+                  <a:srgbClr val="FFFF00"/>
+                </a:highlight>
+              </a:rPr>
+              <a:t>the producer can always produce new items</a:t>
+            </a:r>
+            <a:r>
+              <a:rPr lang="en-IN" sz="2400" dirty="0"/>
+              <a:t>.</a:t>
             </a:r>
             <a:endParaRPr lang="en-US" altLang="en-US" sz="2400" dirty="0"/>
           </a:p>
@@ -10727,14 +10918,38 @@
             <a:pPr lvl="1"/>
             <a:r>
               <a:rPr lang="en-IN" sz="2400" dirty="0"/>
-              <a:t>The consumer must wait if the buffer is empty,</a:t>
+              <a:t>The consumer </a:t>
+            </a:r>
+            <a:r>
+              <a:rPr lang="en-IN" sz="2400" dirty="0">
+                <a:highlight>
+                  <a:srgbClr val="FFFF00"/>
+                </a:highlight>
+              </a:rPr>
+              <a:t>must wait if the buffer is empty</a:t>
+            </a:r>
+            <a:r>
+              <a:rPr lang="en-IN" sz="2400" dirty="0"/>
+              <a:t>,</a:t>
             </a:r>
           </a:p>
           <a:p>
             <a:pPr lvl="1"/>
             <a:r>
               <a:rPr lang="en-IN" sz="2400" dirty="0"/>
-              <a:t>and the producer must wait if the buffer is full.</a:t>
+              <a:t>and the producer </a:t>
+            </a:r>
+            <a:r>
+              <a:rPr lang="en-IN" sz="2400" dirty="0">
+                <a:highlight>
+                  <a:srgbClr val="FFFF00"/>
+                </a:highlight>
+              </a:rPr>
+              <a:t>must wait if the buffer is full</a:t>
+            </a:r>
+            <a:r>
+              <a:rPr lang="en-IN" sz="2400" dirty="0"/>
+              <a:t>.</a:t>
             </a:r>
             <a:endParaRPr lang="en-US" altLang="en-US" sz="2400" dirty="0"/>
           </a:p>
@@ -10757,7 +10972,7 @@
           <a:p>
             <a:fld id="{698B8884-B3B0-4559-9FB2-D50B094695F4}" type="datetime1">
               <a:rPr lang="en-IN" smtClean="0"/>
-              <a:t>23-04-2025</a:t>
+              <a:t>26-04-2025</a:t>
             </a:fld>
             <a:endParaRPr lang="en-IN"/>
           </a:p>
@@ -10899,9 +11114,21 @@
           <a:p>
             <a:r>
               <a:rPr lang="en-IN" sz="2400" dirty="0"/>
-              <a:t>The following variables reside in a region of memory shared by the producer and consumer processes:</a:t>
-            </a:r>
-            <a:endParaRPr lang="en-US" altLang="en-US" sz="2400" dirty="0"/>
+              <a:t>The following variables reside </a:t>
+            </a:r>
+            <a:r>
+              <a:rPr lang="en-IN" sz="2400" dirty="0">
+                <a:highlight>
+                  <a:srgbClr val="FFFF00"/>
+                </a:highlight>
+              </a:rPr>
+              <a:t>in a region of memory shared by the producer and consumer processes:</a:t>
+            </a:r>
+            <a:endParaRPr lang="en-US" altLang="en-US" sz="2400" dirty="0">
+              <a:highlight>
+                <a:srgbClr val="FFFF00"/>
+              </a:highlight>
+            </a:endParaRPr>
           </a:p>
           <a:p>
             <a:pPr marL="1598613" lvl="3">
@@ -11075,7 +11302,7 @@
           <a:p>
             <a:fld id="{FEFE972E-1A56-432A-9871-F093BDCDB61B}" type="datetime1">
               <a:rPr lang="en-IN" smtClean="0"/>
-              <a:t>23-04-2025</a:t>
+              <a:t>26-04-2025</a:t>
             </a:fld>
             <a:endParaRPr lang="en-IN"/>
           </a:p>
@@ -11210,13 +11437,25 @@
           <a:p>
             <a:r>
               <a:rPr lang="en-IN" sz="2600" dirty="0"/>
-              <a:t>The shared buffer is implemented as a circular array </a:t>
+              <a:t>The shared buffer is implemented </a:t>
+            </a:r>
+            <a:r>
+              <a:rPr lang="en-IN" sz="2600" dirty="0">
+                <a:highlight>
+                  <a:srgbClr val="FFFF00"/>
+                </a:highlight>
+              </a:rPr>
+              <a:t>as a circular array </a:t>
             </a:r>
           </a:p>
           <a:p>
             <a:pPr lvl="1"/>
             <a:r>
-              <a:rPr lang="en-IN" sz="2600" dirty="0"/>
+              <a:rPr lang="en-IN" sz="2600" dirty="0">
+                <a:highlight>
+                  <a:srgbClr val="FFFF00"/>
+                </a:highlight>
+              </a:rPr>
               <a:t>with two logical pointers: in and out. </a:t>
             </a:r>
           </a:p>
@@ -11384,7 +11623,7 @@
           <a:p>
             <a:fld id="{730C9BF5-1B6A-44AA-AF50-395A5ECF596A}" type="datetime1">
               <a:rPr lang="en-IN" smtClean="0"/>
-              <a:t>23-04-2025</a:t>
+              <a:t>26-04-2025</a:t>
             </a:fld>
             <a:endParaRPr lang="en-IN"/>
           </a:p>
@@ -11519,25 +11758,39 @@
           <a:p>
             <a:pPr lvl="1"/>
             <a:r>
-              <a:rPr lang="en-IN" sz="2600" dirty="0"/>
+              <a:rPr lang="en-IN" sz="2600" dirty="0">
+                <a:highlight>
+                  <a:srgbClr val="FFFF00"/>
+                </a:highlight>
+              </a:rPr>
               <a:t>in points to the next free position in the buffer; </a:t>
             </a:r>
           </a:p>
           <a:p>
             <a:pPr lvl="1"/>
             <a:r>
-              <a:rPr lang="en-IN" sz="2600" dirty="0"/>
+              <a:rPr lang="en-IN" sz="2600" dirty="0">
+                <a:highlight>
+                  <a:srgbClr val="FFFF00"/>
+                </a:highlight>
+              </a:rPr>
               <a:t>out points to the first full position in the buffer. </a:t>
             </a:r>
           </a:p>
           <a:p>
             <a:endParaRPr lang="en-US" altLang="en-US" sz="1600" dirty="0">
+              <a:highlight>
+                <a:srgbClr val="FFFF00"/>
+              </a:highlight>
               <a:latin typeface="Courier New" pitchFamily="49" charset="0"/>
               <a:cs typeface="Courier New" pitchFamily="49" charset="0"/>
             </a:endParaRPr>
           </a:p>
           <a:p>
             <a:endParaRPr lang="en-US" altLang="en-US" sz="1600" dirty="0">
+              <a:highlight>
+                <a:srgbClr val="FFFF00"/>
+              </a:highlight>
               <a:latin typeface="Courier New" pitchFamily="49" charset="0"/>
               <a:cs typeface="Courier New" pitchFamily="49" charset="0"/>
             </a:endParaRPr>
@@ -11548,6 +11801,9 @@
             </a:pPr>
             <a:r>
               <a:rPr lang="en-US" altLang="en-US" sz="1600" dirty="0">
+                <a:highlight>
+                  <a:srgbClr val="FFFF00"/>
+                </a:highlight>
                 <a:latin typeface="Courier New" pitchFamily="49" charset="0"/>
                 <a:cs typeface="Courier New" pitchFamily="49" charset="0"/>
               </a:rPr>
@@ -11614,7 +11870,7 @@
           <a:p>
             <a:fld id="{834ED9D0-D2D9-48A6-A344-384A12D695B6}" type="datetime1">
               <a:rPr lang="en-IN" smtClean="0"/>
-              <a:t>23-04-2025</a:t>
+              <a:t>26-04-2025</a:t>
             </a:fld>
             <a:endParaRPr lang="en-IN"/>
           </a:p>
@@ -11748,7 +12004,11 @@
           <a:lstStyle/>
           <a:p>
             <a:r>
-              <a:rPr lang="en-IN" sz="2600" dirty="0"/>
+              <a:rPr lang="en-IN" sz="2600" dirty="0">
+                <a:highlight>
+                  <a:srgbClr val="FFFF00"/>
+                </a:highlight>
+              </a:rPr>
               <a:t>The buffer is empty when in== out; </a:t>
             </a:r>
           </a:p>
@@ -11771,7 +12031,7 @@
           <a:p>
             <a:fld id="{E0ADBB27-EA42-4451-8185-A44FBB305FC6}" type="datetime1">
               <a:rPr lang="en-IN" smtClean="0"/>
-              <a:t>23-04-2025</a:t>
+              <a:t>26-04-2025</a:t>
             </a:fld>
             <a:endParaRPr lang="en-IN"/>
           </a:p>
@@ -11946,18 +12206,28 @@
           <a:lstStyle/>
           <a:p>
             <a:r>
-              <a:rPr lang="en-IN" sz="2600" dirty="0"/>
+              <a:rPr lang="en-IN" sz="2600" dirty="0">
+                <a:highlight>
+                  <a:srgbClr val="FFFF00"/>
+                </a:highlight>
+              </a:rPr>
               <a:t>The buffer is full when ((in+ 1)% BUFFER_SIZE) == out.</a:t>
             </a:r>
           </a:p>
           <a:p>
             <a:endParaRPr lang="en-US" altLang="en-US" sz="1600" dirty="0">
+              <a:highlight>
+                <a:srgbClr val="FFFF00"/>
+              </a:highlight>
               <a:latin typeface="Courier New" pitchFamily="49" charset="0"/>
               <a:cs typeface="Courier New" pitchFamily="49" charset="0"/>
             </a:endParaRPr>
           </a:p>
           <a:p>
             <a:endParaRPr lang="en-US" altLang="en-US" sz="1600" dirty="0">
+              <a:highlight>
+                <a:srgbClr val="FFFF00"/>
+              </a:highlight>
               <a:latin typeface="Courier New" pitchFamily="49" charset="0"/>
               <a:cs typeface="Courier New" pitchFamily="49" charset="0"/>
             </a:endParaRPr>
@@ -11968,6 +12238,9 @@
             </a:pPr>
             <a:r>
               <a:rPr lang="en-US" altLang="en-US" sz="1600" dirty="0">
+                <a:highlight>
+                  <a:srgbClr val="FFFF00"/>
+                </a:highlight>
                 <a:latin typeface="Courier New" pitchFamily="49" charset="0"/>
                 <a:cs typeface="Courier New" pitchFamily="49" charset="0"/>
               </a:rPr>
@@ -12045,7 +12318,7 @@
           <a:p>
             <a:fld id="{E0ADBB27-EA42-4451-8185-A44FBB305FC6}" type="datetime1">
               <a:rPr lang="en-IN" smtClean="0"/>
-              <a:t>23-04-2025</a:t>
+              <a:t>26-04-2025</a:t>
             </a:fld>
             <a:endParaRPr lang="en-IN"/>
           </a:p>
@@ -12192,17 +12465,26 @@
           <a:p>
             <a:r>
               <a:rPr lang="en-IN" sz="9600" dirty="0">
+                <a:highlight>
+                  <a:srgbClr val="FFFF00"/>
+                </a:highlight>
                 <a:cs typeface="Arial" panose="020B0604020202020204" pitchFamily="34" charset="0"/>
               </a:rPr>
               <a:t>The producer process has a local variable </a:t>
             </a:r>
             <a:r>
               <a:rPr lang="en-IN" sz="9600" dirty="0" err="1">
+                <a:highlight>
+                  <a:srgbClr val="FFFF00"/>
+                </a:highlight>
                 <a:cs typeface="Arial" panose="020B0604020202020204" pitchFamily="34" charset="0"/>
               </a:rPr>
               <a:t>nextProduced</a:t>
             </a:r>
             <a:endParaRPr lang="en-IN" sz="9600" dirty="0">
+              <a:highlight>
+                <a:srgbClr val="FFFF00"/>
+              </a:highlight>
               <a:cs typeface="Arial" panose="020B0604020202020204" pitchFamily="34" charset="0"/>
             </a:endParaRPr>
           </a:p>
@@ -12210,6 +12492,9 @@
             <a:pPr lvl="1"/>
             <a:r>
               <a:rPr lang="en-IN" sz="9600" dirty="0">
+                <a:highlight>
+                  <a:srgbClr val="FFFF00"/>
+                </a:highlight>
                 <a:cs typeface="Arial" panose="020B0604020202020204" pitchFamily="34" charset="0"/>
               </a:rPr>
               <a:t>in which the new item to be produced is stored. </a:t>
@@ -12222,6 +12507,9 @@
               <a:defRPr/>
             </a:pPr>
             <a:endParaRPr lang="en-US" sz="9600" dirty="0">
+              <a:highlight>
+                <a:srgbClr val="FFFF00"/>
+              </a:highlight>
               <a:cs typeface="Arial" panose="020B0604020202020204" pitchFamily="34" charset="0"/>
             </a:endParaRPr>
           </a:p>
@@ -12233,6 +12521,9 @@
             </a:pPr>
             <a:r>
               <a:rPr lang="en-US" sz="7200" dirty="0">
+                <a:highlight>
+                  <a:srgbClr val="FFFF00"/>
+                </a:highlight>
                 <a:latin typeface="Courier New" panose="02070309020205020404" pitchFamily="49" charset="0"/>
                 <a:cs typeface="Courier New" panose="02070309020205020404" pitchFamily="49" charset="0"/>
               </a:rPr>
@@ -12240,6 +12531,9 @@
             </a:r>
             <a:r>
               <a:rPr lang="en-US" sz="7200" dirty="0" err="1">
+                <a:highlight>
+                  <a:srgbClr val="FFFF00"/>
+                </a:highlight>
                 <a:latin typeface="Courier New" panose="02070309020205020404" pitchFamily="49" charset="0"/>
                 <a:cs typeface="Courier New" panose="02070309020205020404" pitchFamily="49" charset="0"/>
               </a:rPr>
@@ -12247,6 +12541,9 @@
             </a:r>
             <a:r>
               <a:rPr lang="en-US" sz="7200" dirty="0">
+                <a:highlight>
+                  <a:srgbClr val="FFFF00"/>
+                </a:highlight>
                 <a:latin typeface="Courier New" panose="02070309020205020404" pitchFamily="49" charset="0"/>
                 <a:cs typeface="Courier New" panose="02070309020205020404" pitchFamily="49" charset="0"/>
               </a:rPr>
@@ -12261,6 +12558,9 @@
             </a:pPr>
             <a:r>
               <a:rPr lang="en-US" sz="7200" dirty="0">
+                <a:highlight>
+                  <a:srgbClr val="FFFF00"/>
+                </a:highlight>
                 <a:latin typeface="Courier New" panose="02070309020205020404" pitchFamily="49" charset="0"/>
                 <a:cs typeface="Courier New" panose="02070309020205020404" pitchFamily="49" charset="0"/>
               </a:rPr>
@@ -12275,6 +12575,9 @@
             </a:pPr>
             <a:r>
               <a:rPr lang="en-US" sz="7200" dirty="0">
+                <a:highlight>
+                  <a:srgbClr val="FFFF00"/>
+                </a:highlight>
                 <a:latin typeface="Courier New" panose="02070309020205020404" pitchFamily="49" charset="0"/>
                 <a:cs typeface="Courier New" panose="02070309020205020404" pitchFamily="49" charset="0"/>
               </a:rPr>
@@ -12289,6 +12592,9 @@
             </a:pPr>
             <a:r>
               <a:rPr lang="en-US" sz="7200" dirty="0">
+                <a:highlight>
+                  <a:srgbClr val="FFFF00"/>
+                </a:highlight>
                 <a:latin typeface="Courier New" panose="02070309020205020404" pitchFamily="49" charset="0"/>
                 <a:cs typeface="Courier New" panose="02070309020205020404" pitchFamily="49" charset="0"/>
               </a:rPr>
@@ -12303,6 +12609,9 @@
             </a:pPr>
             <a:r>
               <a:rPr lang="en-US" sz="7200" dirty="0">
+                <a:highlight>
+                  <a:srgbClr val="FFFF00"/>
+                </a:highlight>
                 <a:latin typeface="Courier New" panose="02070309020205020404" pitchFamily="49" charset="0"/>
                 <a:cs typeface="Courier New" panose="02070309020205020404" pitchFamily="49" charset="0"/>
               </a:rPr>
@@ -12313,6 +12622,9 @@
                 <a:solidFill>
                   <a:schemeClr val="accent1"/>
                 </a:solidFill>
+                <a:highlight>
+                  <a:srgbClr val="FFFF00"/>
+                </a:highlight>
                 <a:latin typeface="Courier New" panose="02070309020205020404" pitchFamily="49" charset="0"/>
                 <a:cs typeface="Courier New" panose="02070309020205020404" pitchFamily="49" charset="0"/>
               </a:rPr>
@@ -12323,6 +12635,9 @@
                 <a:solidFill>
                   <a:schemeClr val="accent1"/>
                 </a:solidFill>
+                <a:highlight>
+                  <a:srgbClr val="FFFF00"/>
+                </a:highlight>
                 <a:latin typeface="Courier New" panose="02070309020205020404" pitchFamily="49" charset="0"/>
                 <a:cs typeface="Courier New" panose="02070309020205020404" pitchFamily="49" charset="0"/>
               </a:rPr>
@@ -12333,6 +12648,9 @@
                 <a:solidFill>
                   <a:schemeClr val="accent1"/>
                 </a:solidFill>
+                <a:highlight>
+                  <a:srgbClr val="FFFF00"/>
+                </a:highlight>
                 <a:latin typeface="Courier New" panose="02070309020205020404" pitchFamily="49" charset="0"/>
                 <a:cs typeface="Courier New" panose="02070309020205020404" pitchFamily="49" charset="0"/>
               </a:rPr>
@@ -12347,6 +12665,9 @@
             </a:pPr>
             <a:r>
               <a:rPr lang="en-US" sz="7200" dirty="0">
+                <a:highlight>
+                  <a:srgbClr val="FFFF00"/>
+                </a:highlight>
                 <a:latin typeface="Courier New" panose="02070309020205020404" pitchFamily="49" charset="0"/>
                 <a:cs typeface="Courier New" panose="02070309020205020404" pitchFamily="49" charset="0"/>
               </a:rPr>
@@ -12357,6 +12678,9 @@
                 <a:solidFill>
                   <a:schemeClr val="accent1"/>
                 </a:solidFill>
+                <a:highlight>
+                  <a:srgbClr val="FFFF00"/>
+                </a:highlight>
                 <a:latin typeface="Courier New" panose="02070309020205020404" pitchFamily="49" charset="0"/>
                 <a:cs typeface="Courier New" panose="02070309020205020404" pitchFamily="49" charset="0"/>
               </a:rPr>
@@ -12371,6 +12695,9 @@
             </a:pPr>
             <a:r>
               <a:rPr lang="en-US" sz="7200" dirty="0">
+                <a:highlight>
+                  <a:srgbClr val="FFFF00"/>
+                </a:highlight>
                 <a:latin typeface="Courier New" panose="02070309020205020404" pitchFamily="49" charset="0"/>
                 <a:cs typeface="Courier New" panose="02070309020205020404" pitchFamily="49" charset="0"/>
               </a:rPr>
@@ -12487,7 +12814,7 @@
           <a:p>
             <a:fld id="{08E26252-FD6E-437A-B250-F427EE38EA1A}" type="datetime1">
               <a:rPr lang="en-IN" smtClean="0"/>
-              <a:t>23-04-2025</a:t>
+              <a:t>26-04-2025</a:t>
             </a:fld>
             <a:endParaRPr lang="en-IN"/>
           </a:p>
@@ -12622,6 +12949,9 @@
           <a:p>
             <a:r>
               <a:rPr lang="en-IN" altLang="en-US" sz="2400" dirty="0">
+                <a:highlight>
+                  <a:srgbClr val="FFFF00"/>
+                </a:highlight>
                 <a:cs typeface="Courier New" pitchFamily="49" charset="0"/>
               </a:rPr>
               <a:t>The consumer process has a</a:t>
@@ -12631,6 +12961,9 @@
             <a:pPr lvl="1"/>
             <a:r>
               <a:rPr lang="en-IN" altLang="en-US" sz="2400" dirty="0">
+                <a:highlight>
+                  <a:srgbClr val="FFFF00"/>
+                </a:highlight>
                 <a:cs typeface="Courier New" pitchFamily="49" charset="0"/>
               </a:rPr>
               <a:t>local variable next Consumed in which the item to be consumed is stored.</a:t>
@@ -12642,6 +12975,9 @@
               <a:buNone/>
             </a:pPr>
             <a:endParaRPr lang="en-US" altLang="en-US" sz="1600" dirty="0">
+              <a:highlight>
+                <a:srgbClr val="FFFF00"/>
+              </a:highlight>
               <a:latin typeface="Courier New" pitchFamily="49" charset="0"/>
               <a:cs typeface="Courier New" pitchFamily="49" charset="0"/>
             </a:endParaRPr>
@@ -12652,6 +12988,9 @@
               <a:buNone/>
             </a:pPr>
             <a:endParaRPr lang="en-US" altLang="en-US" sz="1600" dirty="0">
+              <a:highlight>
+                <a:srgbClr val="FFFF00"/>
+              </a:highlight>
               <a:latin typeface="Courier New" pitchFamily="49" charset="0"/>
               <a:cs typeface="Courier New" pitchFamily="49" charset="0"/>
             </a:endParaRPr>
@@ -12662,6 +13001,9 @@
               <a:buNone/>
             </a:pPr>
             <a:endParaRPr lang="en-US" altLang="en-US" sz="1600" dirty="0">
+              <a:highlight>
+                <a:srgbClr val="FFFF00"/>
+              </a:highlight>
               <a:latin typeface="Courier New" pitchFamily="49" charset="0"/>
               <a:cs typeface="Courier New" pitchFamily="49" charset="0"/>
             </a:endParaRPr>
@@ -12672,6 +13014,9 @@
               <a:buNone/>
             </a:pPr>
             <a:endParaRPr lang="en-US" altLang="en-US" sz="1600" dirty="0">
+              <a:highlight>
+                <a:srgbClr val="FFFF00"/>
+              </a:highlight>
               <a:latin typeface="Courier New" pitchFamily="49" charset="0"/>
               <a:cs typeface="Courier New" pitchFamily="49" charset="0"/>
             </a:endParaRPr>
@@ -12682,6 +13027,9 @@
               <a:buNone/>
             </a:pPr>
             <a:endParaRPr lang="en-US" altLang="en-US" sz="1600" dirty="0">
+              <a:highlight>
+                <a:srgbClr val="FFFF00"/>
+              </a:highlight>
               <a:latin typeface="Courier New" pitchFamily="49" charset="0"/>
               <a:cs typeface="Courier New" pitchFamily="49" charset="0"/>
             </a:endParaRPr>
@@ -12693,6 +13041,9 @@
             </a:pPr>
             <a:r>
               <a:rPr lang="en-US" altLang="en-US" sz="1800" dirty="0">
+                <a:highlight>
+                  <a:srgbClr val="FFFF00"/>
+                </a:highlight>
                 <a:latin typeface="Courier New" pitchFamily="49" charset="0"/>
                 <a:cs typeface="Courier New" pitchFamily="49" charset="0"/>
               </a:rPr>
@@ -12700,6 +13051,9 @@
             </a:r>
             <a:r>
               <a:rPr lang="en-US" altLang="en-US" sz="1800" dirty="0" err="1">
+                <a:highlight>
+                  <a:srgbClr val="FFFF00"/>
+                </a:highlight>
                 <a:latin typeface="Courier New" pitchFamily="49" charset="0"/>
                 <a:cs typeface="Courier New" pitchFamily="49" charset="0"/>
               </a:rPr>
@@ -12707,6 +13061,9 @@
             </a:r>
             <a:r>
               <a:rPr lang="en-US" altLang="en-US" sz="1800" dirty="0">
+                <a:highlight>
+                  <a:srgbClr val="FFFF00"/>
+                </a:highlight>
                 <a:latin typeface="Courier New" pitchFamily="49" charset="0"/>
                 <a:cs typeface="Courier New" pitchFamily="49" charset="0"/>
               </a:rPr>
@@ -12720,6 +13077,9 @@
             </a:pPr>
             <a:r>
               <a:rPr lang="en-US" altLang="en-US" sz="1800" dirty="0">
+                <a:highlight>
+                  <a:srgbClr val="FFFF00"/>
+                </a:highlight>
                 <a:latin typeface="Courier New" pitchFamily="49" charset="0"/>
                 <a:cs typeface="Courier New" pitchFamily="49" charset="0"/>
               </a:rPr>
@@ -12727,12 +13087,18 @@
             </a:r>
             <a:br>
               <a:rPr lang="en-US" altLang="en-US" sz="1800" dirty="0">
+                <a:highlight>
+                  <a:srgbClr val="FFFF00"/>
+                </a:highlight>
                 <a:latin typeface="Courier New" pitchFamily="49" charset="0"/>
                 <a:cs typeface="Courier New" pitchFamily="49" charset="0"/>
               </a:rPr>
             </a:br>
             <a:r>
               <a:rPr lang="en-US" altLang="en-US" sz="1800" dirty="0">
+                <a:highlight>
+                  <a:srgbClr val="FFFF00"/>
+                </a:highlight>
                 <a:latin typeface="Courier New" pitchFamily="49" charset="0"/>
                 <a:cs typeface="Courier New" pitchFamily="49" charset="0"/>
               </a:rPr>
@@ -12740,12 +13106,18 @@
             </a:r>
             <a:br>
               <a:rPr lang="en-US" altLang="en-US" sz="1800" dirty="0">
+                <a:highlight>
+                  <a:srgbClr val="FFFF00"/>
+                </a:highlight>
                 <a:latin typeface="Courier New" pitchFamily="49" charset="0"/>
                 <a:cs typeface="Courier New" pitchFamily="49" charset="0"/>
               </a:rPr>
             </a:br>
             <a:r>
               <a:rPr lang="en-US" altLang="en-US" sz="1800" dirty="0">
+                <a:highlight>
+                  <a:srgbClr val="FFFF00"/>
+                </a:highlight>
                 <a:latin typeface="Courier New" pitchFamily="49" charset="0"/>
                 <a:cs typeface="Courier New" pitchFamily="49" charset="0"/>
               </a:rPr>
@@ -12753,6 +13125,9 @@
             </a:r>
             <a:r>
               <a:rPr lang="en-US" altLang="en-US" sz="1800" dirty="0" err="1">
+                <a:highlight>
+                  <a:srgbClr val="FFFF00"/>
+                </a:highlight>
                 <a:latin typeface="Courier New" pitchFamily="49" charset="0"/>
                 <a:cs typeface="Courier New" pitchFamily="49" charset="0"/>
               </a:rPr>
@@ -12760,6 +13135,9 @@
             </a:r>
             <a:r>
               <a:rPr lang="en-US" altLang="en-US" sz="1800" dirty="0">
+                <a:highlight>
+                  <a:srgbClr val="FFFF00"/>
+                </a:highlight>
                 <a:latin typeface="Courier New" pitchFamily="49" charset="0"/>
                 <a:cs typeface="Courier New" pitchFamily="49" charset="0"/>
               </a:rPr>
@@ -12773,6 +13151,9 @@
             </a:pPr>
             <a:r>
               <a:rPr lang="en-US" altLang="en-US" sz="1800" dirty="0">
+                <a:highlight>
+                  <a:srgbClr val="FFFF00"/>
+                </a:highlight>
                 <a:latin typeface="Courier New" pitchFamily="49" charset="0"/>
                 <a:cs typeface="Courier New" pitchFamily="49" charset="0"/>
               </a:rPr>
@@ -12780,11 +13161,17 @@
             </a:r>
             <a:br>
               <a:rPr lang="en-US" altLang="en-US" sz="1800" dirty="0">
+                <a:highlight>
+                  <a:srgbClr val="FFFF00"/>
+                </a:highlight>
                 <a:latin typeface="Courier New" pitchFamily="49" charset="0"/>
                 <a:cs typeface="Courier New" pitchFamily="49" charset="0"/>
               </a:rPr>
             </a:br>
             <a:endParaRPr lang="en-US" altLang="en-US" sz="1800" dirty="0">
+              <a:highlight>
+                <a:srgbClr val="FFFF00"/>
+              </a:highlight>
               <a:latin typeface="Courier New" pitchFamily="49" charset="0"/>
               <a:cs typeface="Courier New" pitchFamily="49" charset="0"/>
             </a:endParaRPr>
@@ -12796,6 +13183,9 @@
             </a:pPr>
             <a:r>
               <a:rPr lang="en-US" altLang="en-US" sz="1800" dirty="0">
+                <a:highlight>
+                  <a:srgbClr val="FFFF00"/>
+                </a:highlight>
                 <a:latin typeface="Courier New" pitchFamily="49" charset="0"/>
                 <a:cs typeface="Courier New" pitchFamily="49" charset="0"/>
               </a:rPr>
@@ -12809,6 +13199,9 @@
             </a:pPr>
             <a:r>
               <a:rPr lang="en-US" altLang="en-US" sz="1800" dirty="0">
+                <a:highlight>
+                  <a:srgbClr val="FFFF00"/>
+                </a:highlight>
                 <a:latin typeface="Courier New" pitchFamily="49" charset="0"/>
                 <a:cs typeface="Courier New" pitchFamily="49" charset="0"/>
               </a:rPr>
@@ -12816,6 +13209,9 @@
             </a:r>
             <a:r>
               <a:rPr lang="en-US" altLang="en-US" sz="1600" dirty="0">
+                <a:highlight>
+                  <a:srgbClr val="FFFF00"/>
+                </a:highlight>
                 <a:latin typeface="Courier New" pitchFamily="49" charset="0"/>
                 <a:cs typeface="Courier New" pitchFamily="49" charset="0"/>
               </a:rPr>
@@ -12882,7 +13278,7 @@
           <a:p>
             <a:fld id="{E60E88F2-D3A8-4D30-A4A1-82A0C22BE5FE}" type="datetime1">
               <a:rPr lang="en-IN" smtClean="0"/>
-              <a:t>23-04-2025</a:t>
+              <a:t>26-04-2025</a:t>
             </a:fld>
             <a:endParaRPr lang="en-IN"/>
           </a:p>
@@ -13088,7 +13484,7 @@
           <a:p>
             <a:fld id="{EE891593-8B62-49CF-9684-4AB2AC0BF06A}" type="datetime1">
               <a:rPr lang="en-IN" smtClean="0"/>
-              <a:t>23-04-2025</a:t>
+              <a:t>26-04-2025</a:t>
             </a:fld>
             <a:endParaRPr lang="en-IN"/>
           </a:p>
@@ -13321,7 +13717,7 @@
           <a:p>
             <a:fld id="{73DCB8DE-17DF-45A4-98B9-426EA507EDA3}" type="datetime1">
               <a:rPr lang="en-IN" smtClean="0"/>
-              <a:t>23-04-2025</a:t>
+              <a:t>26-04-2025</a:t>
             </a:fld>
             <a:endParaRPr lang="en-IN"/>
           </a:p>
@@ -13713,7 +14109,11 @@
               </a:lnSpc>
             </a:pPr>
             <a:r>
-              <a:rPr lang="en-US" altLang="en-US" sz="2400" dirty="0"/>
+              <a:rPr lang="en-US" altLang="en-US" sz="2400" dirty="0">
+                <a:highlight>
+                  <a:srgbClr val="FFFF00"/>
+                </a:highlight>
+              </a:rPr>
               <a:t>The communication is under the control of the </a:t>
             </a:r>
           </a:p>
@@ -13724,26 +14124,46 @@
               </a:lnSpc>
             </a:pPr>
             <a:r>
-              <a:rPr lang="en-US" altLang="en-US" sz="2000" dirty="0"/>
+              <a:rPr lang="en-US" altLang="en-US" sz="2000" dirty="0">
+                <a:highlight>
+                  <a:srgbClr val="FFFF00"/>
+                </a:highlight>
+              </a:rPr>
               <a:t>users processes not the operating system.</a:t>
             </a:r>
           </a:p>
           <a:p>
-            <a:endParaRPr lang="en-IN" sz="2400" dirty="0"/>
-          </a:p>
-          <a:p>
-            <a:r>
-              <a:rPr lang="en-IN" sz="2400" dirty="0"/>
+            <a:endParaRPr lang="en-IN" sz="2400" dirty="0">
+              <a:highlight>
+                <a:srgbClr val="FFFF00"/>
+              </a:highlight>
+            </a:endParaRPr>
+          </a:p>
+          <a:p>
+            <a:r>
+              <a:rPr lang="en-IN" sz="2400" dirty="0">
+                <a:highlight>
+                  <a:srgbClr val="FFFF00"/>
+                </a:highlight>
+              </a:rPr>
               <a:t>The code for accessing and manipulating the shared memory be written </a:t>
             </a:r>
           </a:p>
           <a:p>
             <a:pPr lvl="1"/>
             <a:r>
-              <a:rPr lang="en-IN" sz="2000" dirty="0"/>
+              <a:rPr lang="en-IN" sz="2000" dirty="0">
+                <a:highlight>
+                  <a:srgbClr val="FFFF00"/>
+                </a:highlight>
+              </a:rPr>
               <a:t>explicitly by the application programmer.</a:t>
             </a:r>
-            <a:endParaRPr lang="en-US" altLang="en-US" sz="2000" dirty="0"/>
+            <a:endParaRPr lang="en-US" altLang="en-US" sz="2000" dirty="0">
+              <a:highlight>
+                <a:srgbClr val="FFFF00"/>
+              </a:highlight>
+            </a:endParaRPr>
           </a:p>
           <a:p>
             <a:pPr>
@@ -13782,7 +14202,7 @@
           <a:p>
             <a:fld id="{EE891593-8B62-49CF-9684-4AB2AC0BF06A}" type="datetime1">
               <a:rPr lang="en-IN" smtClean="0"/>
-              <a:t>23-04-2025</a:t>
+              <a:t>26-04-2025</a:t>
             </a:fld>
             <a:endParaRPr lang="en-IN"/>
           </a:p>
@@ -13919,7 +14339,11 @@
               </a:lnSpc>
             </a:pPr>
             <a:r>
-              <a:rPr lang="en-US" altLang="en-US" sz="2400" dirty="0"/>
+              <a:rPr lang="en-US" altLang="en-US" sz="2400" dirty="0">
+                <a:highlight>
+                  <a:srgbClr val="FFFF00"/>
+                </a:highlight>
+              </a:rPr>
               <a:t>Major issues is to provide mechanism that will allow the user processes to </a:t>
             </a:r>
           </a:p>
@@ -13930,7 +14354,11 @@
               </a:lnSpc>
             </a:pPr>
             <a:r>
-              <a:rPr lang="en-US" altLang="en-US" sz="2000" dirty="0"/>
+              <a:rPr lang="en-US" altLang="en-US" sz="2000" dirty="0">
+                <a:highlight>
+                  <a:srgbClr val="FFFF00"/>
+                </a:highlight>
+              </a:rPr>
               <a:t>synchronize their actions when they access shared memory. </a:t>
             </a:r>
           </a:p>
@@ -13979,7 +14407,7 @@
           <a:p>
             <a:fld id="{EE891593-8B62-49CF-9684-4AB2AC0BF06A}" type="datetime1">
               <a:rPr lang="en-IN" smtClean="0"/>
-              <a:t>23-04-2025</a:t>
+              <a:t>26-04-2025</a:t>
             </a:fld>
             <a:endParaRPr lang="en-IN"/>
           </a:p>
@@ -14111,7 +14539,7 @@
           <a:p>
             <a:fld id="{6FEEAD4A-29D3-4F69-8AAC-C93B05492D82}" type="datetime1">
               <a:rPr lang="en-IN" smtClean="0"/>
-              <a:t>23-04-2025</a:t>
+              <a:t>26-04-2025</a:t>
             </a:fld>
             <a:endParaRPr lang="en-IN"/>
           </a:p>
@@ -14276,7 +14704,11 @@
               </a:lnSpc>
             </a:pPr>
             <a:r>
-              <a:rPr lang="en-US" altLang="en-US" sz="2800" dirty="0"/>
+              <a:rPr lang="en-US" altLang="en-US" sz="2800" dirty="0">
+                <a:highlight>
+                  <a:srgbClr val="FFFF00"/>
+                </a:highlight>
+              </a:rPr>
               <a:t>Processes communicate with each other </a:t>
             </a:r>
           </a:p>
@@ -14287,7 +14719,11 @@
               </a:lnSpc>
             </a:pPr>
             <a:r>
-              <a:rPr lang="en-US" altLang="en-US" sz="2400" b="1" dirty="0"/>
+              <a:rPr lang="en-US" altLang="en-US" sz="2400" b="1" dirty="0">
+                <a:highlight>
+                  <a:srgbClr val="FFFF00"/>
+                </a:highlight>
+              </a:rPr>
               <a:t>without resorting to shared variables or shared address space</a:t>
             </a:r>
           </a:p>
@@ -14328,7 +14764,7 @@
           <a:p>
             <a:fld id="{66196A8B-3014-404F-B534-C6A704C10646}" type="datetime1">
               <a:rPr lang="en-IN" smtClean="0"/>
-              <a:t>23-04-2025</a:t>
+              <a:t>26-04-2025</a:t>
             </a:fld>
             <a:endParaRPr lang="en-IN"/>
           </a:p>
@@ -14471,14 +14907,22 @@
           <a:p>
             <a:pPr lvl="1"/>
             <a:r>
-              <a:rPr lang="en-US" altLang="en-US" sz="2400" dirty="0"/>
+              <a:rPr lang="en-US" altLang="en-US" sz="2400" dirty="0">
+                <a:highlight>
+                  <a:srgbClr val="FFFF00"/>
+                </a:highlight>
+              </a:rPr>
               <a:t>to communicate and </a:t>
             </a:r>
           </a:p>
           <a:p>
             <a:pPr lvl="1"/>
             <a:r>
-              <a:rPr lang="en-US" altLang="en-US" sz="2400" dirty="0"/>
+              <a:rPr lang="en-US" altLang="en-US" sz="2400" dirty="0">
+                <a:highlight>
+                  <a:srgbClr val="FFFF00"/>
+                </a:highlight>
+              </a:rPr>
               <a:t>to synchronize their actions</a:t>
             </a:r>
           </a:p>
@@ -14535,7 +14979,7 @@
           <a:p>
             <a:fld id="{66196A8B-3014-404F-B534-C6A704C10646}" type="datetime1">
               <a:rPr lang="en-IN" smtClean="0"/>
-              <a:t>23-04-2025</a:t>
+              <a:t>26-04-2025</a:t>
             </a:fld>
             <a:endParaRPr lang="en-IN"/>
           </a:p>
@@ -14748,7 +15192,7 @@
           <a:p>
             <a:fld id="{BE82F27D-7C61-4CE1-95F3-B51C2A6EE7B1}" type="datetime1">
               <a:rPr lang="en-IN" smtClean="0"/>
-              <a:t>23-04-2025</a:t>
+              <a:t>26-04-2025</a:t>
             </a:fld>
             <a:endParaRPr lang="en-IN"/>
           </a:p>
@@ -14880,21 +15324,33 @@
           <a:lstStyle/>
           <a:p>
             <a:r>
-              <a:rPr lang="en-IN" sz="2400" dirty="0"/>
+              <a:rPr lang="en-IN" sz="2400" dirty="0">
+                <a:highlight>
+                  <a:srgbClr val="FFFF00"/>
+                </a:highlight>
+              </a:rPr>
               <a:t>Particularly useful in a distributed environment, </a:t>
             </a:r>
           </a:p>
           <a:p>
             <a:pPr lvl="1"/>
             <a:r>
-              <a:rPr lang="en-IN" sz="2400" dirty="0"/>
+              <a:rPr lang="en-IN" sz="2400" dirty="0">
+                <a:highlight>
+                  <a:srgbClr val="FFFF00"/>
+                </a:highlight>
+              </a:rPr>
               <a:t>where the communicating processes may reside on different computers </a:t>
             </a:r>
           </a:p>
           <a:p>
             <a:pPr lvl="1"/>
             <a:r>
-              <a:rPr lang="en-IN" sz="2400" dirty="0"/>
+              <a:rPr lang="en-IN" sz="2400" dirty="0">
+                <a:highlight>
+                  <a:srgbClr val="FFFF00"/>
+                </a:highlight>
+              </a:rPr>
               <a:t>connected by a network. </a:t>
             </a:r>
           </a:p>
@@ -14903,25 +15359,45 @@
           </a:p>
           <a:p>
             <a:r>
-              <a:rPr lang="en-IN" sz="2400" dirty="0"/>
+              <a:rPr lang="en-IN" sz="2400" dirty="0">
+                <a:highlight>
+                  <a:srgbClr val="FFFF00"/>
+                </a:highlight>
+              </a:rPr>
               <a:t>For example, a </a:t>
             </a:r>
             <a:r>
-              <a:rPr lang="en-IN" sz="2400" b="1" dirty="0"/>
+              <a:rPr lang="en-IN" sz="2400" b="1" dirty="0">
+                <a:highlight>
+                  <a:srgbClr val="FFFF00"/>
+                </a:highlight>
+              </a:rPr>
               <a:t>chat </a:t>
             </a:r>
             <a:r>
-              <a:rPr lang="en-IN" sz="2400" dirty="0"/>
+              <a:rPr lang="en-IN" sz="2400" dirty="0">
+                <a:highlight>
+                  <a:srgbClr val="FFFF00"/>
+                </a:highlight>
+              </a:rPr>
               <a:t>program used on the World Wide Web could be designed so</a:t>
             </a:r>
           </a:p>
           <a:p>
             <a:pPr lvl="1"/>
             <a:r>
-              <a:rPr lang="en-IN" sz="2400" dirty="0"/>
+              <a:rPr lang="en-IN" sz="2400" dirty="0">
+                <a:highlight>
+                  <a:srgbClr val="FFFF00"/>
+                </a:highlight>
+              </a:rPr>
               <a:t>that chat participants communicate with one another by exchanging messages.</a:t>
             </a:r>
-            <a:endParaRPr lang="en-US" altLang="en-US" sz="2400" dirty="0"/>
+            <a:endParaRPr lang="en-US" altLang="en-US" sz="2400" dirty="0">
+              <a:highlight>
+                <a:srgbClr val="FFFF00"/>
+              </a:highlight>
+            </a:endParaRPr>
           </a:p>
           <a:p>
             <a:pPr>
@@ -14960,7 +15436,7 @@
           <a:p>
             <a:fld id="{BE82F27D-7C61-4CE1-95F3-B51C2A6EE7B1}" type="datetime1">
               <a:rPr lang="en-IN" smtClean="0"/>
-              <a:t>23-04-2025</a:t>
+              <a:t>26-04-2025</a:t>
             </a:fld>
             <a:endParaRPr lang="en-IN"/>
           </a:p>
@@ -15170,21 +15646,36 @@
             </a:pPr>
             <a:r>
               <a:rPr lang="en-US" altLang="en-US" b="1" dirty="0">
+                <a:highlight>
+                  <a:srgbClr val="FFFF00"/>
+                </a:highlight>
                 <a:latin typeface="Courier New" pitchFamily="49" charset="0"/>
                 <a:cs typeface="Courier New" pitchFamily="49" charset="0"/>
               </a:rPr>
               <a:t>send</a:t>
             </a:r>
             <a:r>
-              <a:rPr lang="en-US" altLang="en-US" dirty="0"/>
+              <a:rPr lang="en-US" altLang="en-US" dirty="0">
+                <a:highlight>
+                  <a:srgbClr val="FFFF00"/>
+                </a:highlight>
+              </a:rPr>
               <a:t>(</a:t>
             </a:r>
             <a:r>
-              <a:rPr lang="en-US" altLang="en-US" i="1" dirty="0"/>
+              <a:rPr lang="en-US" altLang="en-US" i="1" dirty="0">
+                <a:highlight>
+                  <a:srgbClr val="FFFF00"/>
+                </a:highlight>
+              </a:rPr>
               <a:t>message</a:t>
             </a:r>
             <a:r>
-              <a:rPr lang="en-US" altLang="en-US" dirty="0"/>
+              <a:rPr lang="en-US" altLang="en-US" dirty="0">
+                <a:highlight>
+                  <a:srgbClr val="FFFF00"/>
+                </a:highlight>
+              </a:rPr>
               <a:t>)</a:t>
             </a:r>
           </a:p>
@@ -15196,21 +15687,36 @@
             </a:pPr>
             <a:r>
               <a:rPr lang="en-US" altLang="en-US" b="1" dirty="0">
+                <a:highlight>
+                  <a:srgbClr val="FFFF00"/>
+                </a:highlight>
                 <a:latin typeface="Courier New" pitchFamily="49" charset="0"/>
                 <a:cs typeface="Courier New" pitchFamily="49" charset="0"/>
               </a:rPr>
               <a:t>receive</a:t>
             </a:r>
             <a:r>
-              <a:rPr lang="en-US" altLang="en-US" dirty="0"/>
+              <a:rPr lang="en-US" altLang="en-US" dirty="0">
+                <a:highlight>
+                  <a:srgbClr val="FFFF00"/>
+                </a:highlight>
+              </a:rPr>
               <a:t>(</a:t>
             </a:r>
             <a:r>
-              <a:rPr lang="en-US" altLang="en-US" i="1" dirty="0"/>
+              <a:rPr lang="en-US" altLang="en-US" i="1" dirty="0">
+                <a:highlight>
+                  <a:srgbClr val="FFFF00"/>
+                </a:highlight>
+              </a:rPr>
               <a:t>message</a:t>
             </a:r>
             <a:r>
-              <a:rPr lang="en-US" altLang="en-US" dirty="0"/>
+              <a:rPr lang="en-US" altLang="en-US" dirty="0">
+                <a:highlight>
+                  <a:srgbClr val="FFFF00"/>
+                </a:highlight>
+              </a:rPr>
               <a:t>)</a:t>
             </a:r>
           </a:p>
@@ -15222,7 +15728,11 @@
               <a:buFont typeface="Monotype Sorts" pitchFamily="-84" charset="2"/>
               <a:buNone/>
             </a:pPr>
-            <a:endParaRPr lang="en-US" altLang="en-US" sz="800" dirty="0"/>
+            <a:endParaRPr lang="en-US" altLang="en-US" sz="800" dirty="0">
+              <a:highlight>
+                <a:srgbClr val="FFFF00"/>
+              </a:highlight>
+            </a:endParaRPr>
           </a:p>
           <a:p>
             <a:pPr>
@@ -15231,15 +15741,27 @@
               </a:lnSpc>
             </a:pPr>
             <a:r>
-              <a:rPr lang="en-US" altLang="en-US" dirty="0"/>
+              <a:rPr lang="en-US" altLang="en-US" dirty="0">
+                <a:highlight>
+                  <a:srgbClr val="FFFF00"/>
+                </a:highlight>
+              </a:rPr>
               <a:t>The</a:t>
             </a:r>
             <a:r>
-              <a:rPr lang="en-US" altLang="en-US" i="1" dirty="0"/>
+              <a:rPr lang="en-US" altLang="en-US" i="1" dirty="0">
+                <a:highlight>
+                  <a:srgbClr val="FFFF00"/>
+                </a:highlight>
+              </a:rPr>
               <a:t> message</a:t>
             </a:r>
             <a:r>
-              <a:rPr lang="en-US" altLang="en-US" dirty="0"/>
+              <a:rPr lang="en-US" altLang="en-US" dirty="0">
+                <a:highlight>
+                  <a:srgbClr val="FFFF00"/>
+                </a:highlight>
+              </a:rPr>
               <a:t> size is either </a:t>
             </a:r>
           </a:p>
@@ -15250,7 +15772,11 @@
               </a:lnSpc>
             </a:pPr>
             <a:r>
-              <a:rPr lang="en-US" altLang="en-US" dirty="0"/>
+              <a:rPr lang="en-US" altLang="en-US" dirty="0">
+                <a:highlight>
+                  <a:srgbClr val="FFFF00"/>
+                </a:highlight>
+              </a:rPr>
               <a:t>fixed or </a:t>
             </a:r>
           </a:p>
@@ -15261,7 +15787,11 @@
               </a:lnSpc>
             </a:pPr>
             <a:r>
-              <a:rPr lang="en-US" altLang="en-US" dirty="0"/>
+              <a:rPr lang="en-US" altLang="en-US" dirty="0">
+                <a:highlight>
+                  <a:srgbClr val="FFFF00"/>
+                </a:highlight>
+              </a:rPr>
               <a:t>variable</a:t>
             </a:r>
           </a:p>
@@ -15294,7 +15824,7 @@
           <a:p>
             <a:fld id="{274FC6DA-D1D8-4924-BDB5-205AE6AFE48A}" type="datetime1">
               <a:rPr lang="en-IN" smtClean="0"/>
-              <a:t>23-04-2025</a:t>
+              <a:t>26-04-2025</a:t>
             </a:fld>
             <a:endParaRPr lang="en-IN"/>
           </a:p>
@@ -15484,10 +16014,18 @@
               <a:t>the system-level </a:t>
             </a:r>
             <a:r>
-              <a:rPr lang="en-IN" sz="2400" b="1" dirty="0"/>
+              <a:rPr lang="en-IN" sz="2400" b="1" dirty="0">
+                <a:highlight>
+                  <a:srgbClr val="FFFF00"/>
+                </a:highlight>
+              </a:rPr>
               <a:t>implementation is straightforward.</a:t>
             </a:r>
-            <a:endParaRPr lang="en-US" altLang="en-US" sz="2400" b="1" dirty="0"/>
+            <a:endParaRPr lang="en-US" altLang="en-US" sz="2400" b="1" dirty="0">
+              <a:highlight>
+                <a:srgbClr val="FFFF00"/>
+              </a:highlight>
+            </a:endParaRPr>
           </a:p>
           <a:p>
             <a:pPr lvl="1">
@@ -15496,8 +16034,16 @@
               </a:lnSpc>
             </a:pPr>
             <a:r>
+              <a:rPr lang="en-IN" sz="2400" dirty="0">
+                <a:highlight>
+                  <a:srgbClr val="FFFF00"/>
+                </a:highlight>
+              </a:rPr>
+              <a:t>the task of programming more difficult</a:t>
+            </a:r>
+            <a:r>
               <a:rPr lang="en-IN" sz="2400" dirty="0"/>
-              <a:t>the task of programming more difficult. </a:t>
+              <a:t>. </a:t>
             </a:r>
           </a:p>
           <a:p>
@@ -15522,21 +16068,37 @@
           <a:p>
             <a:pPr lvl="1"/>
             <a:r>
-              <a:rPr lang="en-IN" sz="2400" dirty="0"/>
+              <a:rPr lang="en-IN" sz="2400" dirty="0">
+                <a:highlight>
+                  <a:srgbClr val="FFFF00"/>
+                </a:highlight>
+              </a:rPr>
               <a:t>a more </a:t>
             </a:r>
             <a:r>
-              <a:rPr lang="en-IN" sz="2400" b="1" dirty="0"/>
+              <a:rPr lang="en-IN" sz="2400" b="1" dirty="0">
+                <a:highlight>
+                  <a:srgbClr val="FFFF00"/>
+                </a:highlight>
+              </a:rPr>
               <a:t>complex system-level implementation, </a:t>
             </a:r>
           </a:p>
           <a:p>
             <a:pPr lvl="1"/>
             <a:r>
-              <a:rPr lang="en-IN" sz="2400" dirty="0"/>
+              <a:rPr lang="en-IN" sz="2400" dirty="0">
+                <a:highlight>
+                  <a:srgbClr val="FFFF00"/>
+                </a:highlight>
+              </a:rPr>
               <a:t>but the programming task becomes simpler.</a:t>
             </a:r>
-            <a:endParaRPr lang="en-US" altLang="en-US" sz="2400" dirty="0"/>
+            <a:endParaRPr lang="en-US" altLang="en-US" sz="2400" dirty="0">
+              <a:highlight>
+                <a:srgbClr val="FFFF00"/>
+              </a:highlight>
+            </a:endParaRPr>
           </a:p>
           <a:p>
             <a:pPr lvl="1">
@@ -15567,7 +16129,7 @@
           <a:p>
             <a:fld id="{CDE86F3A-9529-4703-A27D-AD3DC4C63F82}" type="datetime1">
               <a:rPr lang="en-IN" smtClean="0"/>
-              <a:t>23-04-2025</a:t>
+              <a:t>26-04-2025</a:t>
             </a:fld>
             <a:endParaRPr lang="en-IN"/>
           </a:p>
@@ -15703,7 +16265,11 @@
                 <a:spcPct val="90000"/>
               </a:lnSpc>
             </a:pPr>
-            <a:endParaRPr lang="en-US" altLang="en-US" sz="800" dirty="0"/>
+            <a:endParaRPr lang="en-US" altLang="en-US" sz="800" dirty="0">
+              <a:highlight>
+                <a:srgbClr val="FFFF00"/>
+              </a:highlight>
+            </a:endParaRPr>
           </a:p>
           <a:p>
             <a:pPr>
@@ -15712,23 +16278,43 @@
               </a:lnSpc>
             </a:pPr>
             <a:r>
-              <a:rPr lang="en-US" altLang="en-US" sz="2400" dirty="0"/>
+              <a:rPr lang="en-US" altLang="en-US" sz="2400" dirty="0">
+                <a:highlight>
+                  <a:srgbClr val="FFFF00"/>
+                </a:highlight>
+              </a:rPr>
               <a:t>If processes </a:t>
             </a:r>
             <a:r>
-              <a:rPr lang="en-US" altLang="en-US" sz="2400" i="1" dirty="0"/>
+              <a:rPr lang="en-US" altLang="en-US" sz="2400" i="1" dirty="0">
+                <a:highlight>
+                  <a:srgbClr val="FFFF00"/>
+                </a:highlight>
+              </a:rPr>
               <a:t>P</a:t>
             </a:r>
             <a:r>
-              <a:rPr lang="en-US" altLang="en-US" sz="2400" dirty="0"/>
+              <a:rPr lang="en-US" altLang="en-US" sz="2400" dirty="0">
+                <a:highlight>
+                  <a:srgbClr val="FFFF00"/>
+                </a:highlight>
+              </a:rPr>
               <a:t> and </a:t>
             </a:r>
             <a:r>
-              <a:rPr lang="en-US" altLang="en-US" sz="2400" i="1" dirty="0"/>
+              <a:rPr lang="en-US" altLang="en-US" sz="2400" i="1" dirty="0">
+                <a:highlight>
+                  <a:srgbClr val="FFFF00"/>
+                </a:highlight>
+              </a:rPr>
               <a:t>Q</a:t>
             </a:r>
             <a:r>
-              <a:rPr lang="en-US" altLang="en-US" sz="2400" dirty="0"/>
+              <a:rPr lang="en-US" altLang="en-US" sz="2400" dirty="0">
+                <a:highlight>
+                  <a:srgbClr val="FFFF00"/>
+                </a:highlight>
+              </a:rPr>
               <a:t> wish to communicate, they need to:</a:t>
             </a:r>
           </a:p>
@@ -15739,27 +16325,51 @@
               </a:lnSpc>
             </a:pPr>
             <a:r>
-              <a:rPr lang="en-US" altLang="en-US" sz="2400" dirty="0"/>
+              <a:rPr lang="en-US" altLang="en-US" sz="2400" dirty="0">
+                <a:highlight>
+                  <a:srgbClr val="FFFF00"/>
+                </a:highlight>
+              </a:rPr>
               <a:t>Establish a </a:t>
             </a:r>
             <a:r>
-              <a:rPr lang="en-US" altLang="en-US" sz="2400" b="1" i="1" dirty="0"/>
+              <a:rPr lang="en-US" altLang="en-US" sz="2400" b="1" i="1" dirty="0">
+                <a:highlight>
+                  <a:srgbClr val="FFFF00"/>
+                </a:highlight>
+              </a:rPr>
               <a:t>communication</a:t>
             </a:r>
             <a:r>
-              <a:rPr lang="en-US" altLang="en-US" sz="2400" b="1" dirty="0"/>
+              <a:rPr lang="en-US" altLang="en-US" sz="2400" b="1" dirty="0">
+                <a:highlight>
+                  <a:srgbClr val="FFFF00"/>
+                </a:highlight>
+              </a:rPr>
               <a:t> </a:t>
             </a:r>
             <a:r>
-              <a:rPr lang="en-US" altLang="en-US" sz="2400" b="1" i="1" dirty="0"/>
+              <a:rPr lang="en-US" altLang="en-US" sz="2400" b="1" i="1" dirty="0">
+                <a:highlight>
+                  <a:srgbClr val="FFFF00"/>
+                </a:highlight>
+              </a:rPr>
               <a:t>link</a:t>
             </a:r>
             <a:r>
-              <a:rPr lang="en-US" altLang="en-US" sz="2400" b="1" dirty="0"/>
+              <a:rPr lang="en-US" altLang="en-US" sz="2400" b="1" dirty="0">
+                <a:highlight>
+                  <a:srgbClr val="FFFF00"/>
+                </a:highlight>
+              </a:rPr>
               <a:t> </a:t>
             </a:r>
             <a:r>
-              <a:rPr lang="en-US" altLang="en-US" sz="2400" dirty="0"/>
+              <a:rPr lang="en-US" altLang="en-US" sz="2400" dirty="0">
+                <a:highlight>
+                  <a:srgbClr val="FFFF00"/>
+                </a:highlight>
+              </a:rPr>
               <a:t>between them</a:t>
             </a:r>
           </a:p>
@@ -15770,7 +16380,11 @@
               </a:lnSpc>
             </a:pPr>
             <a:r>
-              <a:rPr lang="en-US" altLang="en-US" sz="2400" dirty="0"/>
+              <a:rPr lang="en-US" altLang="en-US" sz="2400" dirty="0">
+                <a:highlight>
+                  <a:srgbClr val="FFFF00"/>
+                </a:highlight>
+              </a:rPr>
               <a:t>Exchange messages via send/receive</a:t>
             </a:r>
           </a:p>
@@ -15793,7 +16407,7 @@
           <a:p>
             <a:fld id="{8A4D5291-04D1-4BB7-BE28-C1D99A1C5FF7}" type="datetime1">
               <a:rPr lang="en-IN" smtClean="0"/>
-              <a:t>23-04-2025</a:t>
+              <a:t>26-04-2025</a:t>
             </a:fld>
             <a:endParaRPr lang="en-IN"/>
           </a:p>
@@ -15933,7 +16547,11 @@
           <a:p>
             <a:pPr lvl="1"/>
             <a:r>
-              <a:rPr lang="en-US" altLang="en-US" dirty="0"/>
+              <a:rPr lang="en-US" altLang="en-US" dirty="0">
+                <a:highlight>
+                  <a:srgbClr val="FFFF00"/>
+                </a:highlight>
+              </a:rPr>
               <a:t>Information sharing</a:t>
             </a:r>
           </a:p>
@@ -15941,7 +16559,15 @@
             <a:pPr lvl="2"/>
             <a:r>
               <a:rPr lang="en-IN" altLang="en-US" dirty="0"/>
-              <a:t>Since several users may be interested in the same piece of information (for instance, a shared file), </a:t>
+              <a:t>Since several users may </a:t>
+            </a:r>
+            <a:r>
+              <a:rPr lang="en-IN" altLang="en-US" dirty="0">
+                <a:highlight>
+                  <a:srgbClr val="FFFF00"/>
+                </a:highlight>
+              </a:rPr>
+              <a:t>be interested in the same piece of information (for instance, a shared file), </a:t>
             </a:r>
           </a:p>
           <a:p>
@@ -15952,7 +16578,19 @@
             <a:pPr lvl="2"/>
             <a:r>
               <a:rPr lang="en-IN" altLang="en-US" dirty="0"/>
-              <a:t>we must provide an environment to allow concurrent access to such information.</a:t>
+              <a:t>we must provide an </a:t>
+            </a:r>
+            <a:r>
+              <a:rPr lang="en-IN" altLang="en-US" dirty="0">
+                <a:highlight>
+                  <a:srgbClr val="FFFF00"/>
+                </a:highlight>
+              </a:rPr>
+              <a:t>environment </a:t>
+            </a:r>
+            <a:r>
+              <a:rPr lang="en-IN" altLang="en-US" dirty="0"/>
+              <a:t>to allow concurrent access to such information.</a:t>
             </a:r>
             <a:endParaRPr lang="en-US" altLang="en-US" dirty="0"/>
           </a:p>
@@ -15975,7 +16613,7 @@
           <a:p>
             <a:fld id="{3DF62302-9D39-480F-AF42-1FD7EA43336F}" type="datetime1">
               <a:rPr lang="en-IN" smtClean="0"/>
-              <a:t>23-04-2025</a:t>
+              <a:t>26-04-2025</a:t>
             </a:fld>
             <a:endParaRPr lang="en-IN"/>
           </a:p>
@@ -16199,7 +16837,7 @@
           <a:p>
             <a:fld id="{29D76473-7518-4807-8C70-4F9A05CEC616}" type="datetime1">
               <a:rPr lang="en-IN" smtClean="0"/>
-              <a:t>23-04-2025</a:t>
+              <a:t>26-04-2025</a:t>
             </a:fld>
             <a:endParaRPr lang="en-IN"/>
           </a:p>
@@ -16349,7 +16987,11 @@
                 <a:spcPct val="90000"/>
               </a:lnSpc>
             </a:pPr>
-            <a:endParaRPr lang="en-US" altLang="en-US" sz="800" dirty="0"/>
+            <a:endParaRPr lang="en-US" altLang="en-US" sz="800" dirty="0">
+              <a:highlight>
+                <a:srgbClr val="FFFF00"/>
+              </a:highlight>
+            </a:endParaRPr>
           </a:p>
           <a:p>
             <a:pPr>
@@ -16358,24 +17000,40 @@
               </a:lnSpc>
             </a:pPr>
             <a:r>
-              <a:rPr lang="en-US" altLang="en-US" sz="2800" dirty="0"/>
+              <a:rPr lang="en-US" altLang="en-US" sz="2800" dirty="0">
+                <a:highlight>
+                  <a:srgbClr val="FFFF00"/>
+                </a:highlight>
+              </a:rPr>
               <a:t>Implementation issues:</a:t>
             </a:r>
           </a:p>
           <a:p>
             <a:pPr lvl="1"/>
             <a:r>
-              <a:rPr lang="en-IN" sz="2400" dirty="0"/>
+              <a:rPr lang="en-IN" sz="2400" dirty="0">
+                <a:highlight>
+                  <a:srgbClr val="FFFF00"/>
+                </a:highlight>
+              </a:rPr>
               <a:t>A link has some capacity that determines the number of messages that can reside in it temporarily </a:t>
             </a:r>
           </a:p>
           <a:p>
             <a:pPr lvl="1"/>
             <a:r>
-              <a:rPr lang="en-IN" sz="2400" dirty="0"/>
+              <a:rPr lang="en-IN" sz="2400" dirty="0">
+                <a:highlight>
+                  <a:srgbClr val="FFFF00"/>
+                </a:highlight>
+              </a:rPr>
               <a:t>for which every link has a queue associated with it</a:t>
             </a:r>
-            <a:endParaRPr lang="en-US" altLang="en-US" sz="2400" dirty="0"/>
+            <a:endParaRPr lang="en-US" altLang="en-US" sz="2400" dirty="0">
+              <a:highlight>
+                <a:srgbClr val="FFFF00"/>
+              </a:highlight>
+            </a:endParaRPr>
           </a:p>
           <a:p>
             <a:pPr>
@@ -16385,7 +17043,11 @@
               <a:buFont typeface="Monotype Sorts" pitchFamily="-84" charset="2"/>
               <a:buNone/>
             </a:pPr>
-            <a:endParaRPr lang="en-US" altLang="en-US" sz="2800" dirty="0"/>
+            <a:endParaRPr lang="en-US" altLang="en-US" sz="2800" dirty="0">
+              <a:highlight>
+                <a:srgbClr val="FFFF00"/>
+              </a:highlight>
+            </a:endParaRPr>
           </a:p>
         </p:txBody>
       </p:sp>
@@ -16406,7 +17068,7 @@
           <a:p>
             <a:fld id="{29D76473-7518-4807-8C70-4F9A05CEC616}" type="datetime1">
               <a:rPr lang="en-IN" smtClean="0"/>
-              <a:t>23-04-2025</a:t>
+              <a:t>26-04-2025</a:t>
             </a:fld>
             <a:endParaRPr lang="en-IN"/>
           </a:p>
@@ -16584,7 +17246,11 @@
               </a:lnSpc>
             </a:pPr>
             <a:r>
-              <a:rPr lang="en-US" altLang="en-US" dirty="0"/>
+              <a:rPr lang="en-US" altLang="en-US" dirty="0">
+                <a:highlight>
+                  <a:srgbClr val="FFFF00"/>
+                </a:highlight>
+              </a:rPr>
               <a:t>Physical:</a:t>
             </a:r>
           </a:p>
@@ -16595,7 +17261,11 @@
               </a:lnSpc>
             </a:pPr>
             <a:r>
-              <a:rPr lang="en-US" altLang="en-US" dirty="0"/>
+              <a:rPr lang="en-US" altLang="en-US" dirty="0">
+                <a:highlight>
+                  <a:srgbClr val="FFFF00"/>
+                </a:highlight>
+              </a:rPr>
               <a:t>Shared memory</a:t>
             </a:r>
           </a:p>
@@ -16606,7 +17276,11 @@
               </a:lnSpc>
             </a:pPr>
             <a:r>
-              <a:rPr lang="en-US" altLang="en-US" dirty="0"/>
+              <a:rPr lang="en-US" altLang="en-US" dirty="0">
+                <a:highlight>
+                  <a:srgbClr val="FFFF00"/>
+                </a:highlight>
+              </a:rPr>
               <a:t>Hardware bus</a:t>
             </a:r>
           </a:p>
@@ -16617,7 +17291,11 @@
               </a:lnSpc>
             </a:pPr>
             <a:r>
-              <a:rPr lang="en-US" altLang="en-US" dirty="0"/>
+              <a:rPr lang="en-US" altLang="en-US" dirty="0">
+                <a:highlight>
+                  <a:srgbClr val="FFFF00"/>
+                </a:highlight>
+              </a:rPr>
               <a:t>Network</a:t>
             </a:r>
           </a:p>
@@ -16628,7 +17306,11 @@
               </a:lnSpc>
             </a:pPr>
             <a:r>
-              <a:rPr lang="en-US" altLang="en-US" dirty="0"/>
+              <a:rPr lang="en-US" altLang="en-US" dirty="0">
+                <a:highlight>
+                  <a:srgbClr val="FFFF00"/>
+                </a:highlight>
+              </a:rPr>
               <a:t>Logical:</a:t>
             </a:r>
           </a:p>
@@ -16639,7 +17321,11 @@
               </a:lnSpc>
             </a:pPr>
             <a:r>
-              <a:rPr lang="en-US" altLang="en-US" dirty="0"/>
+              <a:rPr lang="en-US" altLang="en-US" dirty="0">
+                <a:highlight>
+                  <a:srgbClr val="FFFF00"/>
+                </a:highlight>
+              </a:rPr>
               <a:t> Direct or indirect</a:t>
             </a:r>
           </a:p>
@@ -16650,7 +17336,11 @@
               </a:lnSpc>
             </a:pPr>
             <a:r>
-              <a:rPr lang="en-US" altLang="en-US" dirty="0"/>
+              <a:rPr lang="en-US" altLang="en-US" dirty="0">
+                <a:highlight>
+                  <a:srgbClr val="FFFF00"/>
+                </a:highlight>
+              </a:rPr>
               <a:t> Synchronous or asynchronous</a:t>
             </a:r>
           </a:p>
@@ -16661,7 +17351,11 @@
               </a:lnSpc>
             </a:pPr>
             <a:r>
-              <a:rPr lang="en-US" altLang="en-US" dirty="0"/>
+              <a:rPr lang="en-US" altLang="en-US" dirty="0">
+                <a:highlight>
+                  <a:srgbClr val="FFFF00"/>
+                </a:highlight>
+              </a:rPr>
               <a:t> Automatic or explicit buffering</a:t>
             </a:r>
           </a:p>
@@ -16684,7 +17378,7 @@
           <a:p>
             <a:fld id="{0EA85746-D569-48E3-A7F9-290A975DAD3C}" type="datetime1">
               <a:rPr lang="en-IN" smtClean="0"/>
-              <a:t>23-04-2025</a:t>
+              <a:t>26-04-2025</a:t>
             </a:fld>
             <a:endParaRPr lang="en-IN"/>
           </a:p>
@@ -16891,7 +17585,7 @@
           <a:p>
             <a:fld id="{A9FA3012-901C-4696-9327-2A224F38544A}" type="datetime1">
               <a:rPr lang="en-IN" smtClean="0"/>
-              <a:t>23-04-2025</a:t>
+              <a:t>26-04-2025</a:t>
             </a:fld>
             <a:endParaRPr lang="en-IN"/>
           </a:p>
@@ -17025,7 +17719,11 @@
           <a:lstStyle/>
           <a:p>
             <a:r>
-              <a:rPr lang="en-US" altLang="en-US" sz="2800" dirty="0"/>
+              <a:rPr lang="en-US" altLang="en-US" sz="2800" dirty="0">
+                <a:highlight>
+                  <a:srgbClr val="FFFF00"/>
+                </a:highlight>
+              </a:rPr>
               <a:t>Processes must name each other explicitly:</a:t>
             </a:r>
           </a:p>
@@ -17033,21 +17731,36 @@
             <a:pPr lvl="1"/>
             <a:r>
               <a:rPr lang="en-US" altLang="en-US" sz="2400" b="1" u="sng" dirty="0">
+                <a:highlight>
+                  <a:srgbClr val="FFFF00"/>
+                </a:highlight>
                 <a:latin typeface="Courier New" pitchFamily="49" charset="0"/>
                 <a:cs typeface="Courier New" pitchFamily="49" charset="0"/>
               </a:rPr>
               <a:t>send</a:t>
             </a:r>
             <a:r>
-              <a:rPr lang="en-US" altLang="en-US" sz="2400" b="1" u="sng" dirty="0"/>
+              <a:rPr lang="en-US" altLang="en-US" sz="2400" b="1" u="sng" dirty="0">
+                <a:highlight>
+                  <a:srgbClr val="FFFF00"/>
+                </a:highlight>
+              </a:rPr>
               <a:t> (</a:t>
             </a:r>
             <a:r>
-              <a:rPr lang="en-US" altLang="en-US" sz="2400" b="1" i="1" u="sng" dirty="0"/>
+              <a:rPr lang="en-US" altLang="en-US" sz="2400" b="1" i="1" u="sng" dirty="0">
+                <a:highlight>
+                  <a:srgbClr val="FFFF00"/>
+                </a:highlight>
+              </a:rPr>
               <a:t>P, message</a:t>
             </a:r>
             <a:r>
-              <a:rPr lang="en-US" altLang="en-US" sz="2400" b="1" u="sng" dirty="0"/>
+              <a:rPr lang="en-US" altLang="en-US" sz="2400" b="1" u="sng" dirty="0">
+                <a:highlight>
+                  <a:srgbClr val="FFFF00"/>
+                </a:highlight>
+              </a:rPr>
               <a:t>) – send a message to process P</a:t>
             </a:r>
           </a:p>
@@ -17055,21 +17768,36 @@
             <a:pPr lvl="1"/>
             <a:r>
               <a:rPr lang="en-US" altLang="en-US" sz="2400" b="1" u="sng" dirty="0">
+                <a:highlight>
+                  <a:srgbClr val="FFFF00"/>
+                </a:highlight>
                 <a:latin typeface="Courier New" pitchFamily="49" charset="0"/>
                 <a:cs typeface="Courier New" pitchFamily="49" charset="0"/>
               </a:rPr>
               <a:t>receive</a:t>
             </a:r>
             <a:r>
-              <a:rPr lang="en-US" altLang="en-US" sz="2400" u="sng" dirty="0"/>
+              <a:rPr lang="en-US" altLang="en-US" sz="2400" u="sng" dirty="0">
+                <a:highlight>
+                  <a:srgbClr val="FFFF00"/>
+                </a:highlight>
+              </a:rPr>
               <a:t>(</a:t>
             </a:r>
             <a:r>
-              <a:rPr lang="en-US" altLang="en-US" sz="2400" i="1" u="sng" dirty="0"/>
+              <a:rPr lang="en-US" altLang="en-US" sz="2400" i="1" u="sng" dirty="0">
+                <a:highlight>
+                  <a:srgbClr val="FFFF00"/>
+                </a:highlight>
+              </a:rPr>
               <a:t>Q, message</a:t>
             </a:r>
             <a:r>
-              <a:rPr lang="en-US" altLang="en-US" sz="2400" u="sng" dirty="0"/>
+              <a:rPr lang="en-US" altLang="en-US" sz="2400" u="sng" dirty="0">
+                <a:highlight>
+                  <a:srgbClr val="FFFF00"/>
+                </a:highlight>
+              </a:rPr>
               <a:t>) – receive a message from process Q</a:t>
             </a:r>
           </a:p>
@@ -17133,7 +17861,7 @@
           <a:p>
             <a:fld id="{6D776F75-DB15-439D-BF67-48B4A570DD43}" type="datetime1">
               <a:rPr lang="en-IN" smtClean="0"/>
-              <a:t>23-04-2025</a:t>
+              <a:t>26-04-2025</a:t>
             </a:fld>
             <a:endParaRPr lang="en-IN"/>
           </a:p>
@@ -17240,40 +17968,72 @@
               <a:buNone/>
             </a:pPr>
             <a:r>
-              <a:rPr lang="en-US" altLang="en-US" sz="2400" dirty="0"/>
+              <a:rPr lang="en-US" altLang="en-US" sz="2400" dirty="0">
+                <a:highlight>
+                  <a:srgbClr val="FFFF00"/>
+                </a:highlight>
+              </a:rPr>
               <a:t>Properties of communication link</a:t>
             </a:r>
           </a:p>
           <a:p>
             <a:r>
-              <a:rPr lang="en-US" altLang="en-US" sz="2400" dirty="0"/>
+              <a:rPr lang="en-US" altLang="en-US" sz="2400" dirty="0">
+                <a:highlight>
+                  <a:srgbClr val="FFFF00"/>
+                </a:highlight>
+              </a:rPr>
               <a:t>Links are established automatically </a:t>
             </a:r>
             <a:r>
-              <a:rPr lang="en-IN" sz="2400" dirty="0"/>
+              <a:rPr lang="en-IN" sz="2400" dirty="0">
+                <a:highlight>
+                  <a:srgbClr val="FFFF00"/>
+                </a:highlight>
+              </a:rPr>
               <a:t>between every pair of processes that want to communicate. </a:t>
             </a:r>
           </a:p>
           <a:p>
             <a:pPr lvl="1"/>
             <a:r>
-              <a:rPr lang="en-IN" sz="2400" dirty="0"/>
+              <a:rPr lang="en-IN" sz="2400" dirty="0">
+                <a:highlight>
+                  <a:srgbClr val="FFFF00"/>
+                </a:highlight>
+              </a:rPr>
               <a:t>The processes need to know </a:t>
             </a:r>
             <a:r>
-              <a:rPr lang="en-IN" sz="2400" b="1" dirty="0"/>
+              <a:rPr lang="en-IN" sz="2400" b="1" dirty="0">
+                <a:highlight>
+                  <a:srgbClr val="FFFF00"/>
+                </a:highlight>
+              </a:rPr>
               <a:t>only each other's identity to communicate.</a:t>
             </a:r>
-            <a:endParaRPr lang="en-US" altLang="en-US" sz="2400" b="1" dirty="0"/>
+            <a:endParaRPr lang="en-US" altLang="en-US" sz="2400" b="1" dirty="0">
+              <a:highlight>
+                <a:srgbClr val="FFFF00"/>
+              </a:highlight>
+            </a:endParaRPr>
           </a:p>
           <a:p>
             <a:pPr lvl="1"/>
             <a:r>
-              <a:rPr lang="en-US" altLang="en-US" sz="2400" dirty="0"/>
+              <a:rPr lang="en-US" altLang="en-US" sz="2400" dirty="0">
+                <a:highlight>
+                  <a:srgbClr val="FFFF00"/>
+                </a:highlight>
+              </a:rPr>
               <a:t>A link is associated with </a:t>
             </a:r>
             <a:r>
-              <a:rPr lang="en-US" altLang="en-US" sz="2400" b="1" dirty="0"/>
+              <a:rPr lang="en-US" altLang="en-US" sz="2400" b="1" dirty="0">
+                <a:highlight>
+                  <a:srgbClr val="FFFF00"/>
+                </a:highlight>
+              </a:rPr>
               <a:t>exactly one pair of communicating processes</a:t>
             </a:r>
           </a:p>
@@ -17284,6 +18044,9 @@
                 <a:solidFill>
                   <a:srgbClr val="FF0000"/>
                 </a:solidFill>
+                <a:highlight>
+                  <a:srgbClr val="FFFF00"/>
+                </a:highlight>
               </a:rPr>
               <a:t>Between each pair there exists exactly one link</a:t>
             </a:r>
@@ -17291,11 +18054,19 @@
           <a:p>
             <a:pPr lvl="1"/>
             <a:r>
-              <a:rPr lang="en-US" altLang="en-US" sz="2400" dirty="0"/>
+              <a:rPr lang="en-US" altLang="en-US" sz="2400" dirty="0">
+                <a:highlight>
+                  <a:srgbClr val="FFFF00"/>
+                </a:highlight>
+              </a:rPr>
               <a:t>The link may be unidirectional, but is </a:t>
             </a:r>
             <a:r>
-              <a:rPr lang="en-US" altLang="en-US" sz="2400" b="1" dirty="0"/>
+              <a:rPr lang="en-US" altLang="en-US" sz="2400" b="1" dirty="0">
+                <a:highlight>
+                  <a:srgbClr val="FFFF00"/>
+                </a:highlight>
+              </a:rPr>
               <a:t>usually bi-directional</a:t>
             </a:r>
           </a:p>
@@ -17348,7 +18119,7 @@
           <a:p>
             <a:fld id="{7EA34394-F5DF-44C0-A590-8B68A0118BB7}" type="datetime1">
               <a:rPr lang="en-IN" smtClean="0"/>
-              <a:t>23-04-2025</a:t>
+              <a:t>26-04-2025</a:t>
             </a:fld>
             <a:endParaRPr lang="en-IN"/>
           </a:p>
@@ -17447,31 +18218,55 @@
           <a:lstStyle/>
           <a:p>
             <a:r>
-              <a:rPr lang="en-IN" sz="2600" dirty="0"/>
+              <a:rPr lang="en-IN" sz="2600" dirty="0">
+                <a:highlight>
+                  <a:srgbClr val="FFFF00"/>
+                </a:highlight>
+              </a:rPr>
               <a:t>This scheme </a:t>
             </a:r>
             <a:r>
-              <a:rPr lang="en-IN" sz="2600" b="1" dirty="0"/>
+              <a:rPr lang="en-IN" sz="2600" b="1" dirty="0">
+                <a:highlight>
+                  <a:srgbClr val="FFFF00"/>
+                </a:highlight>
+              </a:rPr>
               <a:t>exhibits symmetry in addressing</a:t>
             </a:r>
             <a:r>
-              <a:rPr lang="en-IN" sz="2600" dirty="0"/>
+              <a:rPr lang="en-IN" sz="2600" dirty="0">
+                <a:highlight>
+                  <a:srgbClr val="FFFF00"/>
+                </a:highlight>
+              </a:rPr>
               <a:t>; that is, </a:t>
             </a:r>
           </a:p>
           <a:p>
             <a:pPr lvl="1"/>
             <a:r>
-              <a:rPr lang="en-IN" sz="2600" dirty="0"/>
+              <a:rPr lang="en-IN" sz="2600" dirty="0">
+                <a:highlight>
+                  <a:srgbClr val="FFFF00"/>
+                </a:highlight>
+              </a:rPr>
               <a:t>both the sender process and the receiver process </a:t>
             </a:r>
             <a:r>
-              <a:rPr lang="en-IN" sz="2600" b="1" dirty="0"/>
+              <a:rPr lang="en-IN" sz="2600" b="1" dirty="0">
+                <a:highlight>
+                  <a:srgbClr val="FFFF00"/>
+                </a:highlight>
+              </a:rPr>
               <a:t>must name the other to communicate.</a:t>
             </a:r>
           </a:p>
           <a:p>
-            <a:endParaRPr lang="en-IN" sz="2600" b="1" dirty="0"/>
+            <a:endParaRPr lang="en-IN" sz="2600" b="1" dirty="0">
+              <a:highlight>
+                <a:srgbClr val="FFFF00"/>
+              </a:highlight>
+            </a:endParaRPr>
           </a:p>
         </p:txBody>
       </p:sp>
@@ -17522,7 +18317,7 @@
           <a:p>
             <a:fld id="{FB7A13D4-92A8-4D58-8283-998B11EEE295}" type="datetime1">
               <a:rPr lang="en-IN" smtClean="0"/>
-              <a:t>23-04-2025</a:t>
+              <a:t>26-04-2025</a:t>
             </a:fld>
             <a:endParaRPr lang="en-IN"/>
           </a:p>
@@ -17636,15 +18431,27 @@
           <a:p>
             <a:pPr lvl="1"/>
             <a:r>
+              <a:rPr lang="en-IN" sz="2600" dirty="0">
+                <a:highlight>
+                  <a:srgbClr val="FFFF00"/>
+                </a:highlight>
+              </a:rPr>
+              <a:t>Only the sender names the recipient; </a:t>
+            </a:r>
+          </a:p>
+          <a:p>
+            <a:pPr lvl="1"/>
+            <a:r>
+              <a:rPr lang="en-IN" sz="2600" dirty="0">
+                <a:highlight>
+                  <a:srgbClr val="FFFF00"/>
+                </a:highlight>
+              </a:rPr>
+              <a:t>the recipient is not required to name the sender</a:t>
+            </a:r>
+            <a:r>
               <a:rPr lang="en-IN" sz="2600" dirty="0"/>
-              <a:t>Only the sender names the recipient; </a:t>
-            </a:r>
-          </a:p>
-          <a:p>
-            <a:pPr lvl="1"/>
-            <a:r>
-              <a:rPr lang="en-IN" sz="2600" dirty="0"/>
-              <a:t>the recipient is not required to name the sender. </a:t>
+              <a:t>. </a:t>
             </a:r>
           </a:p>
         </p:txBody>
@@ -17696,7 +18503,7 @@
           <a:p>
             <a:fld id="{87DAFB48-11F0-4C4E-95B3-E8B86C06E352}" type="datetime1">
               <a:rPr lang="en-IN" smtClean="0"/>
-              <a:t>23-04-2025</a:t>
+              <a:t>26-04-2025</a:t>
             </a:fld>
             <a:endParaRPr lang="en-IN"/>
           </a:p>
@@ -17863,29 +18670,49 @@
           <a:p>
             <a:pPr lvl="1"/>
             <a:r>
-              <a:rPr lang="en-IN" sz="2400" b="1" dirty="0"/>
+              <a:rPr lang="en-IN" sz="2400" b="1" dirty="0">
+                <a:highlight>
+                  <a:srgbClr val="FFFF00"/>
+                </a:highlight>
+              </a:rPr>
               <a:t>send(P, message) -Send a message to process P.</a:t>
             </a:r>
           </a:p>
           <a:p>
             <a:pPr lvl="1"/>
             <a:r>
-              <a:rPr lang="en-IN" sz="2400" b="1" dirty="0"/>
+              <a:rPr lang="en-IN" sz="2400" b="1" dirty="0">
+                <a:highlight>
+                  <a:srgbClr val="FFFF00"/>
+                </a:highlight>
+              </a:rPr>
               <a:t>receive (id, message) -Receive a message from any process; </a:t>
             </a:r>
           </a:p>
           <a:p>
             <a:pPr lvl="1"/>
             <a:r>
-              <a:rPr lang="en-IN" sz="2400" dirty="0"/>
+              <a:rPr lang="en-IN" sz="2400" dirty="0">
+                <a:highlight>
+                  <a:srgbClr val="FFFF00"/>
+                </a:highlight>
+              </a:rPr>
               <a:t>the variable </a:t>
             </a:r>
             <a:r>
-              <a:rPr lang="en-IN" sz="2400" i="1" dirty="0"/>
+              <a:rPr lang="en-IN" sz="2400" i="1" dirty="0">
+                <a:highlight>
+                  <a:srgbClr val="FFFF00"/>
+                </a:highlight>
+              </a:rPr>
               <a:t>id </a:t>
             </a:r>
             <a:r>
-              <a:rPr lang="en-IN" sz="2400" dirty="0"/>
+              <a:rPr lang="en-IN" sz="2400" dirty="0">
+                <a:highlight>
+                  <a:srgbClr val="FFFF00"/>
+                </a:highlight>
+              </a:rPr>
               <a:t>is set to the name of the process with which communication has taken place.</a:t>
             </a:r>
           </a:p>
@@ -17908,7 +18735,7 @@
           <a:p>
             <a:fld id="{724EA198-390D-46FB-B713-2DED430EFB21}" type="datetime1">
               <a:rPr lang="en-IN" smtClean="0"/>
-              <a:t>23-04-2025</a:t>
+              <a:t>26-04-2025</a:t>
             </a:fld>
             <a:endParaRPr lang="en-IN"/>
           </a:p>
@@ -17959,8 +18786,8 @@
           </a:p>
         </p:txBody>
       </p:sp>
-      <mc:AlternateContent xmlns:mc="http://schemas.openxmlformats.org/markup-compatibility/2006" xmlns:p14="http://schemas.microsoft.com/office/powerpoint/2010/main">
-        <mc:Choice Requires="p14">
+      <mc:AlternateContent xmlns:mc="http://schemas.openxmlformats.org/markup-compatibility/2006">
+        <mc:Choice xmlns:p14="http://schemas.microsoft.com/office/powerpoint/2010/main" Requires="p14">
           <p:contentPart p14:bwMode="auto" r:id="rId2">
             <p14:nvContentPartPr>
               <p14:cNvPr id="7" name="Ink 6"/>
@@ -17968,12 +18795,12 @@
               <p14:nvPr/>
             </p14:nvContentPartPr>
             <p14:xfrm>
-              <a:off x="2384280" y="4116600"/>
+              <a:off x="1821420" y="4077072"/>
               <a:ext cx="5501160" cy="116280"/>
             </p14:xfrm>
           </p:contentPart>
         </mc:Choice>
-        <mc:Fallback xmlns="">
+        <mc:Fallback>
           <p:pic>
             <p:nvPicPr>
               <p:cNvPr id="7" name="Ink 6"/>
@@ -17988,7 +18815,7 @@
             </p:blipFill>
             <p:spPr>
               <a:xfrm>
-                <a:off x="2374920" y="4107240"/>
+                <a:off x="1812060" y="4067712"/>
                 <a:ext cx="5519880" cy="135000"/>
               </a:xfrm>
               <a:prstGeom prst="rect">
@@ -18265,58 +19092,110 @@
           <a:lstStyle/>
           <a:p>
             <a:r>
-              <a:rPr lang="en-IN" sz="2400" dirty="0"/>
+              <a:rPr lang="en-IN" sz="2400" dirty="0">
+                <a:highlight>
+                  <a:srgbClr val="FFFF00"/>
+                </a:highlight>
+              </a:rPr>
               <a:t>Limited modularity of the resulting process definitions. </a:t>
             </a:r>
           </a:p>
           <a:p>
-            <a:endParaRPr lang="en-IN" sz="2400" dirty="0"/>
-          </a:p>
-          <a:p>
-            <a:r>
-              <a:rPr lang="en-IN" sz="2400" dirty="0"/>
+            <a:endParaRPr lang="en-IN" sz="2400" dirty="0">
+              <a:highlight>
+                <a:srgbClr val="FFFF00"/>
+              </a:highlight>
+            </a:endParaRPr>
+          </a:p>
+          <a:p>
+            <a:r>
+              <a:rPr lang="en-IN" sz="2400" dirty="0">
+                <a:highlight>
+                  <a:srgbClr val="FFFF00"/>
+                </a:highlight>
+              </a:rPr>
               <a:t>Changing the identifier of a process may necessitate </a:t>
             </a:r>
             <a:r>
-              <a:rPr lang="en-IN" sz="2400" b="1" u="sng" dirty="0"/>
+              <a:rPr lang="en-IN" sz="2400" b="1" u="sng" dirty="0">
+                <a:highlight>
+                  <a:srgbClr val="FFFF00"/>
+                </a:highlight>
+              </a:rPr>
               <a:t>examining all other process definitions.</a:t>
             </a:r>
           </a:p>
           <a:p>
-            <a:endParaRPr lang="en-IN" sz="2400" b="1" u="sng" dirty="0"/>
-          </a:p>
-          <a:p>
-            <a:r>
-              <a:rPr lang="en-IN" sz="2400" dirty="0"/>
+            <a:endParaRPr lang="en-IN" sz="2400" b="1" u="sng" dirty="0">
+              <a:highlight>
+                <a:srgbClr val="FFFF00"/>
+              </a:highlight>
+            </a:endParaRPr>
+          </a:p>
+          <a:p>
+            <a:r>
+              <a:rPr lang="en-IN" sz="2400" dirty="0">
+                <a:highlight>
+                  <a:srgbClr val="FFFF00"/>
+                </a:highlight>
+              </a:rPr>
               <a:t>All references to the </a:t>
             </a:r>
             <a:r>
-              <a:rPr lang="en-IN" sz="2400" b="1" u="sng" dirty="0"/>
+              <a:rPr lang="en-IN" sz="2400" b="1" u="sng" dirty="0">
+                <a:highlight>
+                  <a:srgbClr val="FFFF00"/>
+                </a:highlight>
+              </a:rPr>
               <a:t>old identifier must be found</a:t>
             </a:r>
             <a:r>
-              <a:rPr lang="en-IN" sz="2400" dirty="0"/>
+              <a:rPr lang="en-IN" sz="2400" dirty="0">
+                <a:highlight>
+                  <a:srgbClr val="FFFF00"/>
+                </a:highlight>
+              </a:rPr>
               <a:t>, so that they can be modified to the new identifier. </a:t>
             </a:r>
           </a:p>
           <a:p>
-            <a:endParaRPr lang="en-IN" sz="2400" dirty="0"/>
-          </a:p>
-          <a:p>
-            <a:r>
-              <a:rPr lang="en-IN" sz="2400" dirty="0"/>
+            <a:endParaRPr lang="en-IN" sz="2400" dirty="0">
+              <a:highlight>
+                <a:srgbClr val="FFFF00"/>
+              </a:highlight>
+            </a:endParaRPr>
+          </a:p>
+          <a:p>
+            <a:r>
+              <a:rPr lang="en-IN" sz="2400" dirty="0">
+                <a:highlight>
+                  <a:srgbClr val="FFFF00"/>
+                </a:highlight>
+              </a:rPr>
               <a:t>Any such </a:t>
             </a:r>
             <a:r>
-              <a:rPr lang="en-IN" sz="2400" b="1" dirty="0"/>
+              <a:rPr lang="en-IN" sz="2400" b="1" dirty="0">
+                <a:highlight>
+                  <a:srgbClr val="FFFF00"/>
+                </a:highlight>
+              </a:rPr>
               <a:t>hard-coding </a:t>
             </a:r>
             <a:r>
-              <a:rPr lang="en-IN" sz="2400" dirty="0"/>
+              <a:rPr lang="en-IN" sz="2400" dirty="0">
+                <a:highlight>
+                  <a:srgbClr val="FFFF00"/>
+                </a:highlight>
+              </a:rPr>
               <a:t>techniques, where identifiers must be explicitly stated, are </a:t>
             </a:r>
             <a:r>
-              <a:rPr lang="en-IN" sz="2400" b="1" u="sng" dirty="0"/>
+              <a:rPr lang="en-IN" sz="2400" b="1" u="sng" dirty="0">
+                <a:highlight>
+                  <a:srgbClr val="FFFF00"/>
+                </a:highlight>
+              </a:rPr>
               <a:t>less desirable than techniques involving indirection.</a:t>
             </a:r>
           </a:p>
@@ -18471,7 +19350,7 @@
           <a:p>
             <a:fld id="{333C32C4-CAE8-431A-B7A2-0ADBA7B9C82C}" type="datetime1">
               <a:rPr lang="en-IN" smtClean="0"/>
-              <a:t>23-04-2025</a:t>
+              <a:t>26-04-2025</a:t>
             </a:fld>
             <a:endParaRPr lang="en-IN"/>
           </a:p>
@@ -18611,7 +19490,11 @@
           <a:p>
             <a:pPr lvl="1"/>
             <a:r>
-              <a:rPr lang="en-US" altLang="en-US" dirty="0"/>
+              <a:rPr lang="en-US" altLang="en-US" dirty="0">
+                <a:highlight>
+                  <a:srgbClr val="FFFF00"/>
+                </a:highlight>
+              </a:rPr>
               <a:t>Computation speedup</a:t>
             </a:r>
           </a:p>
@@ -18643,17 +19526,29 @@
           <a:p>
             <a:pPr lvl="2"/>
             <a:r>
-              <a:rPr lang="en-IN" altLang="en-US" dirty="0"/>
+              <a:rPr lang="en-IN" altLang="en-US" dirty="0">
+                <a:highlight>
+                  <a:srgbClr val="FFFF00"/>
+                </a:highlight>
+              </a:rPr>
               <a:t>A speedup can be achieved only if </a:t>
             </a:r>
           </a:p>
           <a:p>
             <a:pPr lvl="3"/>
             <a:r>
-              <a:rPr lang="en-IN" altLang="en-US" dirty="0"/>
+              <a:rPr lang="en-IN" altLang="en-US" dirty="0">
+                <a:highlight>
+                  <a:srgbClr val="FFFF00"/>
+                </a:highlight>
+              </a:rPr>
               <a:t>the computer has multiple processing elements (such as CPUs or I/O channels).</a:t>
             </a:r>
-            <a:endParaRPr lang="en-US" altLang="en-US" dirty="0"/>
+            <a:endParaRPr lang="en-US" altLang="en-US" dirty="0">
+              <a:highlight>
+                <a:srgbClr val="FFFF00"/>
+              </a:highlight>
+            </a:endParaRPr>
           </a:p>
         </p:txBody>
       </p:sp>
@@ -18674,7 +19569,7 @@
           <a:p>
             <a:fld id="{0A80166B-C610-43EF-9C60-48B6816DEEA2}" type="datetime1">
               <a:rPr lang="en-IN" smtClean="0"/>
-              <a:t>23-04-2025</a:t>
+              <a:t>26-04-2025</a:t>
             </a:fld>
             <a:endParaRPr lang="en-IN"/>
           </a:p>
@@ -18808,7 +19703,11 @@
           <a:lstStyle/>
           <a:p>
             <a:r>
-              <a:rPr lang="en-US" altLang="en-US" dirty="0"/>
+              <a:rPr lang="en-US" altLang="en-US" dirty="0">
+                <a:highlight>
+                  <a:srgbClr val="FFFF00"/>
+                </a:highlight>
+              </a:rPr>
               <a:t>Messages are directed and received from mailboxes (also referred to as ports)</a:t>
             </a:r>
           </a:p>
@@ -18822,7 +19721,11 @@
           <a:p>
             <a:pPr lvl="1"/>
             <a:r>
-              <a:rPr lang="en-US" altLang="en-US" dirty="0"/>
+              <a:rPr lang="en-US" altLang="en-US" dirty="0">
+                <a:highlight>
+                  <a:srgbClr val="FFFF00"/>
+                </a:highlight>
+              </a:rPr>
               <a:t>Processes can communicate only if they share a mailbox</a:t>
             </a:r>
           </a:p>
@@ -18845,7 +19748,7 @@
           <a:p>
             <a:fld id="{B24F91F1-DE04-45E2-967C-5FC955AB69A6}" type="datetime1">
               <a:rPr lang="en-IN" smtClean="0"/>
-              <a:t>23-04-2025</a:t>
+              <a:t>26-04-2025</a:t>
             </a:fld>
             <a:endParaRPr lang="en-IN"/>
           </a:p>
@@ -19001,7 +19904,27 @@
             <a:pPr lvl="1"/>
             <a:r>
               <a:rPr lang="en-IN" dirty="0"/>
-              <a:t>Each mailbox has a unique identification</a:t>
+              <a:t>Each </a:t>
+            </a:r>
+            <a:r>
+              <a:rPr lang="en-IN" dirty="0">
+                <a:highlight>
+                  <a:srgbClr val="FFFF00"/>
+                </a:highlight>
+              </a:rPr>
+              <a:t>mailbox</a:t>
+            </a:r>
+            <a:r>
+              <a:rPr lang="en-IN" dirty="0"/>
+              <a:t> has a </a:t>
+            </a:r>
+            <a:r>
+              <a:rPr lang="en-IN" dirty="0">
+                <a:highlight>
+                  <a:srgbClr val="FFFF00"/>
+                </a:highlight>
+              </a:rPr>
+              <a:t>unique identification</a:t>
             </a:r>
           </a:p>
         </p:txBody>
@@ -19064,7 +19987,7 @@
           <a:p>
             <a:fld id="{182F8D51-EB16-4636-BBFD-F87DF1D36A32}" type="datetime1">
               <a:rPr lang="en-IN" smtClean="0"/>
-              <a:t>23-04-2025</a:t>
+              <a:t>26-04-2025</a:t>
             </a:fld>
             <a:endParaRPr lang="en-IN"/>
           </a:p>
@@ -19216,6 +20139,9 @@
                 <a:solidFill>
                   <a:srgbClr val="FF0000"/>
                 </a:solidFill>
+                <a:highlight>
+                  <a:srgbClr val="FFFF00"/>
+                </a:highlight>
               </a:rPr>
               <a:t>A process can communicate with some other process </a:t>
             </a:r>
@@ -19224,16 +20150,27 @@
                 <a:solidFill>
                   <a:srgbClr val="FF0000"/>
                 </a:solidFill>
+                <a:highlight>
+                  <a:srgbClr val="FFFF00"/>
+                </a:highlight>
               </a:rPr>
               <a:t>via a number of different mailboxes.</a:t>
             </a:r>
           </a:p>
           <a:p>
-            <a:endParaRPr lang="en-IN" sz="2400" b="1" u="sng" dirty="0"/>
-          </a:p>
-          <a:p>
-            <a:r>
-              <a:rPr lang="en-IN" sz="2400" dirty="0"/>
+            <a:endParaRPr lang="en-IN" sz="2400" b="1" u="sng" dirty="0">
+              <a:highlight>
+                <a:srgbClr val="FFFF00"/>
+              </a:highlight>
+            </a:endParaRPr>
+          </a:p>
+          <a:p>
+            <a:r>
+              <a:rPr lang="en-IN" sz="2400" dirty="0">
+                <a:highlight>
+                  <a:srgbClr val="FFFF00"/>
+                </a:highlight>
+              </a:rPr>
               <a:t>Two processes can communicate only if the processes have a shared mailbox,</a:t>
             </a:r>
           </a:p>
@@ -19339,7 +20276,7 @@
           <a:p>
             <a:fld id="{B311EE36-DD90-46A1-84BF-F9E55368155B}" type="datetime1">
               <a:rPr lang="en-IN" smtClean="0"/>
-              <a:t>23-04-2025</a:t>
+              <a:t>26-04-2025</a:t>
             </a:fld>
             <a:endParaRPr lang="en-IN"/>
           </a:p>
@@ -19494,7 +20431,11 @@
           <a:p>
             <a:pPr lvl="1"/>
             <a:r>
-              <a:rPr lang="en-US" altLang="en-US" b="1" dirty="0"/>
+              <a:rPr lang="en-US" altLang="en-US" b="1" dirty="0">
+                <a:highlight>
+                  <a:srgbClr val="FFFF00"/>
+                </a:highlight>
+              </a:rPr>
               <a:t>Link established only if processes share a common mailbox</a:t>
             </a:r>
           </a:p>
@@ -19512,6 +20453,9 @@
                 <a:solidFill>
                   <a:srgbClr val="FF0000"/>
                 </a:solidFill>
+                <a:highlight>
+                  <a:srgbClr val="FFFF00"/>
+                </a:highlight>
               </a:rPr>
               <a:t>Between Each pair of communicating processes, there may be a number of different links with each link corresponding to one mailbox</a:t>
             </a:r>
@@ -19542,7 +20486,7 @@
           <a:p>
             <a:fld id="{2C94CD26-51EE-4ED0-B976-39D4BFC25DB2}" type="datetime1">
               <a:rPr lang="en-IN" smtClean="0"/>
-              <a:t>23-04-2025</a:t>
+              <a:t>26-04-2025</a:t>
             </a:fld>
             <a:endParaRPr lang="en-IN" dirty="0"/>
           </a:p>
@@ -19757,7 +20701,7 @@
           <a:p>
             <a:fld id="{71158BFB-2D56-4D75-9E1D-326EA25CF8A3}" type="datetime1">
               <a:rPr lang="en-IN" smtClean="0"/>
-              <a:t>23-04-2025</a:t>
+              <a:t>26-04-2025</a:t>
             </a:fld>
             <a:endParaRPr lang="en-IN"/>
           </a:p>
@@ -20020,7 +20964,7 @@
           <a:p>
             <a:fld id="{89D12A74-924C-41E9-86A6-65F997BAF2AA}" type="datetime1">
               <a:rPr lang="en-IN" smtClean="0"/>
-              <a:t>23-04-2025</a:t>
+              <a:t>26-04-2025</a:t>
             </a:fld>
             <a:endParaRPr lang="en-IN"/>
           </a:p>
@@ -20157,28 +21101,48 @@
               <a:buNone/>
             </a:pPr>
             <a:r>
-              <a:rPr lang="en-US" altLang="en-US" dirty="0"/>
+              <a:rPr lang="en-US" altLang="en-US" dirty="0">
+                <a:highlight>
+                  <a:srgbClr val="FFFF00"/>
+                </a:highlight>
+              </a:rPr>
               <a:t>Solutions</a:t>
             </a:r>
           </a:p>
           <a:p>
             <a:r>
-              <a:rPr lang="en-IN" dirty="0"/>
+              <a:rPr lang="en-IN" dirty="0">
+                <a:highlight>
+                  <a:srgbClr val="FFFF00"/>
+                </a:highlight>
+              </a:rPr>
               <a:t>The answer depends on which of the following methods we choose:</a:t>
             </a:r>
-            <a:endParaRPr lang="en-US" altLang="en-US" dirty="0"/>
+            <a:endParaRPr lang="en-US" altLang="en-US" dirty="0">
+              <a:highlight>
+                <a:srgbClr val="FFFF00"/>
+              </a:highlight>
+            </a:endParaRPr>
           </a:p>
           <a:p>
             <a:pPr lvl="1"/>
             <a:r>
-              <a:rPr lang="en-IN" dirty="0"/>
+              <a:rPr lang="en-IN" dirty="0">
+                <a:highlight>
+                  <a:srgbClr val="FFFF00"/>
+                </a:highlight>
+              </a:rPr>
               <a:t>This can be solved by either </a:t>
             </a:r>
           </a:p>
           <a:p>
             <a:pPr lvl="1"/>
             <a:r>
-              <a:rPr lang="en-IN" b="1" dirty="0"/>
+              <a:rPr lang="en-IN" b="1" dirty="0">
+                <a:highlight>
+                  <a:srgbClr val="FFFF00"/>
+                </a:highlight>
+              </a:rPr>
               <a:t>Enforcing that only two processes can share a single mailbox</a:t>
             </a:r>
           </a:p>
@@ -20187,30 +21151,54 @@
               <a:buNone/>
             </a:pPr>
             <a:r>
-              <a:rPr lang="en-IN" altLang="en-US" b="1" dirty="0"/>
+              <a:rPr lang="en-IN" altLang="en-US" b="1" dirty="0">
+                <a:highlight>
+                  <a:srgbClr val="FFFF00"/>
+                </a:highlight>
+              </a:rPr>
               <a:t>or</a:t>
             </a:r>
-            <a:endParaRPr lang="en-US" altLang="en-US" b="1" dirty="0"/>
+            <a:endParaRPr lang="en-US" altLang="en-US" b="1" dirty="0">
+              <a:highlight>
+                <a:srgbClr val="FFFF00"/>
+              </a:highlight>
+            </a:endParaRPr>
           </a:p>
           <a:p>
             <a:pPr lvl="1"/>
             <a:r>
-              <a:rPr lang="en-US" altLang="en-US" b="1" dirty="0"/>
+              <a:rPr lang="en-US" altLang="en-US" b="1" dirty="0">
+                <a:highlight>
+                  <a:srgbClr val="FFFF00"/>
+                </a:highlight>
+              </a:rPr>
               <a:t>Allow only one process at a time to execute a receive operation</a:t>
             </a:r>
           </a:p>
           <a:p>
             <a:pPr lvl="1"/>
             <a:r>
-              <a:rPr lang="en-IN" dirty="0"/>
+              <a:rPr lang="en-IN" dirty="0">
+                <a:highlight>
+                  <a:srgbClr val="FFFF00"/>
+                </a:highlight>
+              </a:rPr>
               <a:t>That is, either P2 or </a:t>
             </a:r>
             <a:r>
-              <a:rPr lang="en-IN" i="1" dirty="0"/>
+              <a:rPr lang="en-IN" i="1" dirty="0">
+                <a:highlight>
+                  <a:srgbClr val="FFFF00"/>
+                </a:highlight>
+              </a:rPr>
               <a:t>P3, </a:t>
             </a:r>
             <a:r>
-              <a:rPr lang="en-IN" dirty="0"/>
+              <a:rPr lang="en-IN" dirty="0">
+                <a:highlight>
+                  <a:srgbClr val="FFFF00"/>
+                </a:highlight>
+              </a:rPr>
               <a:t>but not both, will receive the message</a:t>
             </a:r>
           </a:p>
@@ -20219,44 +21207,76 @@
               <a:buNone/>
             </a:pPr>
             <a:r>
-              <a:rPr lang="en-IN" altLang="en-US" b="1" dirty="0"/>
+              <a:rPr lang="en-IN" altLang="en-US" b="1" dirty="0">
+                <a:highlight>
+                  <a:srgbClr val="FFFF00"/>
+                </a:highlight>
+              </a:rPr>
               <a:t>or</a:t>
             </a:r>
-            <a:endParaRPr lang="en-US" altLang="en-US" dirty="0"/>
+            <a:endParaRPr lang="en-US" altLang="en-US" dirty="0">
+              <a:highlight>
+                <a:srgbClr val="FFFF00"/>
+              </a:highlight>
+            </a:endParaRPr>
           </a:p>
           <a:p>
             <a:pPr lvl="1"/>
             <a:r>
-              <a:rPr lang="en-US" altLang="en-US" b="1" dirty="0"/>
+              <a:rPr lang="en-US" altLang="en-US" b="1" dirty="0">
+                <a:highlight>
+                  <a:srgbClr val="FFFF00"/>
+                </a:highlight>
+              </a:rPr>
               <a:t>Allow the system to select arbitrarily the receiver</a:t>
             </a:r>
           </a:p>
           <a:p>
             <a:pPr lvl="1"/>
             <a:r>
-              <a:rPr lang="en-IN" dirty="0"/>
+              <a:rPr lang="en-IN" dirty="0">
+                <a:highlight>
+                  <a:srgbClr val="FFFF00"/>
+                </a:highlight>
+              </a:rPr>
               <a:t>The system also may define an algorithm for selecting which process will receive the message </a:t>
             </a:r>
           </a:p>
           <a:p>
             <a:pPr lvl="2"/>
             <a:r>
-              <a:rPr lang="en-IN" sz="2800" dirty="0"/>
+              <a:rPr lang="en-IN" sz="2800" dirty="0">
+                <a:highlight>
+                  <a:srgbClr val="FFFF00"/>
+                </a:highlight>
+              </a:rPr>
               <a:t>that is, </a:t>
             </a:r>
             <a:r>
-              <a:rPr lang="en-IN" sz="2800" i="1" dirty="0"/>
+              <a:rPr lang="en-IN" sz="2800" i="1" dirty="0">
+                <a:highlight>
+                  <a:srgbClr val="FFFF00"/>
+                </a:highlight>
+              </a:rPr>
               <a:t>round robin, </a:t>
             </a:r>
             <a:r>
-              <a:rPr lang="en-IN" sz="2800" dirty="0"/>
+              <a:rPr lang="en-IN" sz="2800" dirty="0">
+                <a:highlight>
+                  <a:srgbClr val="FFFF00"/>
+                </a:highlight>
+              </a:rPr>
               <a:t>where processes take turns receiving messages</a:t>
             </a:r>
           </a:p>
           <a:p>
             <a:pPr lvl="1"/>
             <a:r>
-              <a:rPr lang="en-US" altLang="en-US" dirty="0"/>
+              <a:rPr lang="en-US" altLang="en-US" dirty="0">
+                <a:highlight>
+                  <a:srgbClr val="FFFF00"/>
+                </a:highlight>
+              </a:rPr>
               <a:t>Sender is notified about the receiver.</a:t>
             </a:r>
           </a:p>
@@ -20279,7 +21299,7 @@
           <a:p>
             <a:fld id="{D3D44098-A5A6-4504-8BA2-5C70D6758422}" type="datetime1">
               <a:rPr lang="en-IN" smtClean="0"/>
-              <a:t>23-04-2025</a:t>
+              <a:t>26-04-2025</a:t>
             </a:fld>
             <a:endParaRPr lang="en-IN"/>
           </a:p>
@@ -20432,7 +21452,7 @@
           <a:p>
             <a:fld id="{28078750-6303-4448-B47D-8282ADDADEAB}" type="datetime1">
               <a:rPr lang="en-IN" smtClean="0"/>
-              <a:t>23-04-2025</a:t>
+              <a:t>26-04-2025</a:t>
             </a:fld>
             <a:endParaRPr lang="en-IN"/>
           </a:p>
@@ -20550,21 +21570,33 @@
           <a:lstStyle/>
           <a:p>
             <a:r>
-              <a:rPr lang="en-IN" dirty="0"/>
+              <a:rPr lang="en-IN" dirty="0">
+                <a:highlight>
+                  <a:srgbClr val="FFFF00"/>
+                </a:highlight>
+              </a:rPr>
               <a:t>A mailbox may be owned either </a:t>
             </a:r>
           </a:p>
           <a:p>
             <a:pPr lvl="1"/>
             <a:r>
-              <a:rPr lang="en-IN" dirty="0"/>
+              <a:rPr lang="en-IN" dirty="0">
+                <a:highlight>
+                  <a:srgbClr val="FFFF00"/>
+                </a:highlight>
+              </a:rPr>
               <a:t>by a process or </a:t>
             </a:r>
           </a:p>
           <a:p>
             <a:pPr lvl="1"/>
             <a:r>
-              <a:rPr lang="en-IN" dirty="0"/>
+              <a:rPr lang="en-IN" dirty="0">
+                <a:highlight>
+                  <a:srgbClr val="FFFF00"/>
+                </a:highlight>
+              </a:rPr>
               <a:t>by the operating system.</a:t>
             </a:r>
           </a:p>
@@ -20587,7 +21619,7 @@
           <a:p>
             <a:fld id="{D9403CF9-6A8A-47DC-A4B1-748A9AB6D3B8}" type="datetime1">
               <a:rPr lang="en-IN" smtClean="0"/>
-              <a:t>23-04-2025</a:t>
+              <a:t>26-04-2025</a:t>
             </a:fld>
             <a:endParaRPr lang="en-IN"/>
           </a:p>
@@ -20724,41 +21756,73 @@
           <a:lstStyle/>
           <a:p>
             <a:r>
-              <a:rPr lang="en-IN" sz="2400" dirty="0"/>
+              <a:rPr lang="en-IN" sz="2400" dirty="0">
+                <a:highlight>
+                  <a:srgbClr val="FFFF00"/>
+                </a:highlight>
+              </a:rPr>
               <a:t>Mailbox is part of the address space of the process</a:t>
             </a:r>
           </a:p>
           <a:p>
-            <a:endParaRPr lang="en-IN" sz="2400" dirty="0"/>
-          </a:p>
-          <a:p>
-            <a:r>
-              <a:rPr lang="en-IN" sz="2400" b="1" dirty="0"/>
+            <a:endParaRPr lang="en-IN" sz="2400" dirty="0">
+              <a:highlight>
+                <a:srgbClr val="FFFF00"/>
+              </a:highlight>
+            </a:endParaRPr>
+          </a:p>
+          <a:p>
+            <a:r>
+              <a:rPr lang="en-IN" sz="2400" b="1" dirty="0">
+                <a:highlight>
+                  <a:srgbClr val="FFFF00"/>
+                </a:highlight>
+              </a:rPr>
               <a:t>The owner can only receive messages through this mailbox</a:t>
             </a:r>
           </a:p>
           <a:p>
-            <a:endParaRPr lang="en-IN" sz="2400" dirty="0"/>
-          </a:p>
-          <a:p>
-            <a:r>
-              <a:rPr lang="en-IN" sz="2400" b="1" dirty="0"/>
+            <a:endParaRPr lang="en-IN" sz="2400" dirty="0">
+              <a:highlight>
+                <a:srgbClr val="FFFF00"/>
+              </a:highlight>
+            </a:endParaRPr>
+          </a:p>
+          <a:p>
+            <a:r>
+              <a:rPr lang="en-IN" sz="2400" b="1" dirty="0">
+                <a:highlight>
+                  <a:srgbClr val="FFFF00"/>
+                </a:highlight>
+              </a:rPr>
               <a:t>The user can only send messages to the mailbox </a:t>
             </a:r>
           </a:p>
           <a:p>
-            <a:endParaRPr lang="en-IN" sz="2400" b="1" dirty="0"/>
-          </a:p>
-          <a:p>
-            <a:r>
-              <a:rPr lang="en-IN" sz="2400" dirty="0"/>
+            <a:endParaRPr lang="en-IN" sz="2400" b="1" dirty="0">
+              <a:highlight>
+                <a:srgbClr val="FFFF00"/>
+              </a:highlight>
+            </a:endParaRPr>
+          </a:p>
+          <a:p>
+            <a:r>
+              <a:rPr lang="en-IN" sz="2400" dirty="0">
+                <a:highlight>
+                  <a:srgbClr val="FFFF00"/>
+                </a:highlight>
+              </a:rPr>
               <a:t>Since each mailbox has a unique owner, </a:t>
             </a:r>
           </a:p>
           <a:p>
             <a:pPr lvl="1"/>
             <a:r>
-              <a:rPr lang="en-IN" sz="2400" dirty="0"/>
+              <a:rPr lang="en-IN" sz="2400" dirty="0">
+                <a:highlight>
+                  <a:srgbClr val="FFFF00"/>
+                </a:highlight>
+              </a:rPr>
               <a:t>there can be no confusion about which process should receive a message sent to this mailbox. </a:t>
             </a:r>
           </a:p>
@@ -20781,7 +21845,7 @@
           <a:p>
             <a:fld id="{7CCAADA1-19F0-4A52-A10B-6473442E6BCC}" type="datetime1">
               <a:rPr lang="en-IN" smtClean="0"/>
-              <a:t>23-04-2025</a:t>
+              <a:t>26-04-2025</a:t>
             </a:fld>
             <a:endParaRPr lang="en-IN"/>
           </a:p>
@@ -20921,7 +21985,11 @@
           <a:p>
             <a:pPr lvl="1"/>
             <a:r>
-              <a:rPr lang="en-US" altLang="en-US" dirty="0"/>
+              <a:rPr lang="en-US" altLang="en-US" dirty="0">
+                <a:highlight>
+                  <a:srgbClr val="FFFF00"/>
+                </a:highlight>
+              </a:rPr>
               <a:t>Modularity</a:t>
             </a:r>
           </a:p>
@@ -20943,7 +22011,11 @@
           <a:p>
             <a:pPr lvl="1"/>
             <a:r>
-              <a:rPr lang="en-US" altLang="en-US" dirty="0"/>
+              <a:rPr lang="en-US" altLang="en-US" dirty="0">
+                <a:highlight>
+                  <a:srgbClr val="FFFF00"/>
+                </a:highlight>
+              </a:rPr>
               <a:t>Convenience</a:t>
             </a:r>
           </a:p>
@@ -20981,7 +22053,7 @@
           <a:p>
             <a:fld id="{CA59AB34-08ED-4D28-8722-EBB97347B7A9}" type="datetime1">
               <a:rPr lang="en-IN" smtClean="0"/>
-              <a:t>23-04-2025</a:t>
+              <a:t>26-04-2025</a:t>
             </a:fld>
             <a:endParaRPr lang="en-IN"/>
           </a:p>
@@ -21134,7 +22206,7 @@
           <a:p>
             <a:fld id="{FED78C75-583F-4FA8-B172-3750A6D89D59}" type="datetime1">
               <a:rPr lang="en-IN" smtClean="0"/>
-              <a:t>23-04-2025</a:t>
+              <a:t>26-04-2025</a:t>
             </a:fld>
             <a:endParaRPr lang="en-IN"/>
           </a:p>
@@ -21257,30 +22329,50 @@
           <a:lstStyle/>
           <a:p>
             <a:r>
-              <a:rPr lang="en-IN" sz="2400" b="1" dirty="0"/>
+              <a:rPr lang="en-IN" sz="2400" b="1" dirty="0">
+                <a:highlight>
+                  <a:srgbClr val="FFFF00"/>
+                </a:highlight>
+              </a:rPr>
               <a:t>When a process that owns a mailbox terminates, </a:t>
             </a:r>
           </a:p>
           <a:p>
             <a:pPr lvl="1"/>
             <a:r>
-              <a:rPr lang="en-IN" sz="2400" b="1" dirty="0"/>
+              <a:rPr lang="en-IN" sz="2400" b="1" dirty="0">
+                <a:highlight>
+                  <a:srgbClr val="FFFF00"/>
+                </a:highlight>
+              </a:rPr>
               <a:t>the mailbox disappears</a:t>
             </a:r>
           </a:p>
           <a:p>
-            <a:endParaRPr lang="en-IN" sz="2400" dirty="0"/>
-          </a:p>
-          <a:p>
-            <a:r>
-              <a:rPr lang="en-IN" sz="2400" dirty="0"/>
+            <a:endParaRPr lang="en-IN" sz="2400" dirty="0">
+              <a:highlight>
+                <a:srgbClr val="FFFF00"/>
+              </a:highlight>
+            </a:endParaRPr>
+          </a:p>
+          <a:p>
+            <a:r>
+              <a:rPr lang="en-IN" sz="2400" dirty="0">
+                <a:highlight>
+                  <a:srgbClr val="FFFF00"/>
+                </a:highlight>
+              </a:rPr>
               <a:t>Any process that subsequently sends a message to this mailbox </a:t>
             </a:r>
           </a:p>
           <a:p>
             <a:pPr lvl="1"/>
             <a:r>
-              <a:rPr lang="en-IN" sz="2400" dirty="0"/>
+              <a:rPr lang="en-IN" sz="2400" dirty="0">
+                <a:highlight>
+                  <a:srgbClr val="FFFF00"/>
+                </a:highlight>
+              </a:rPr>
               <a:t>must be notified that the mailbox no longer exists.</a:t>
             </a:r>
           </a:p>
@@ -21303,7 +22395,7 @@
           <a:p>
             <a:fld id="{487F893D-25B4-496D-9964-4C540EEE3393}" type="datetime1">
               <a:rPr lang="en-IN" smtClean="0"/>
-              <a:t>23-04-2025</a:t>
+              <a:t>26-04-2025</a:t>
             </a:fld>
             <a:endParaRPr lang="en-IN"/>
           </a:p>
@@ -21440,16 +22532,28 @@
           <a:lstStyle/>
           <a:p>
             <a:r>
-              <a:rPr lang="en-IN" sz="2400" dirty="0"/>
+              <a:rPr lang="en-IN" sz="2400" dirty="0">
+                <a:highlight>
+                  <a:srgbClr val="FFFF00"/>
+                </a:highlight>
+              </a:rPr>
               <a:t>A mailbox that is owned by the operating system has an existence of its own. </a:t>
             </a:r>
           </a:p>
           <a:p>
-            <a:endParaRPr lang="en-IN" sz="2400" dirty="0"/>
-          </a:p>
-          <a:p>
-            <a:r>
-              <a:rPr lang="en-IN" sz="2400" dirty="0"/>
+            <a:endParaRPr lang="en-IN" sz="2400" dirty="0">
+              <a:highlight>
+                <a:srgbClr val="FFFF00"/>
+              </a:highlight>
+            </a:endParaRPr>
+          </a:p>
+          <a:p>
+            <a:r>
+              <a:rPr lang="en-IN" sz="2400" dirty="0">
+                <a:highlight>
+                  <a:srgbClr val="FFFF00"/>
+                </a:highlight>
+              </a:rPr>
               <a:t>It is independent and is not attached to any particular process. </a:t>
             </a:r>
           </a:p>
@@ -21472,7 +22576,7 @@
           <a:p>
             <a:fld id="{7A19F3F8-808E-459C-9D62-E11F4ECD8F63}" type="datetime1">
               <a:rPr lang="en-IN" smtClean="0"/>
-              <a:t>23-04-2025</a:t>
+              <a:t>26-04-2025</a:t>
             </a:fld>
             <a:endParaRPr lang="en-IN"/>
           </a:p>
@@ -21609,29 +22713,49 @@
           <a:lstStyle/>
           <a:p>
             <a:r>
-              <a:rPr lang="en-IN" sz="2400" dirty="0"/>
+              <a:rPr lang="en-IN" sz="2400" dirty="0">
+                <a:highlight>
+                  <a:srgbClr val="FFFF00"/>
+                </a:highlight>
+              </a:rPr>
               <a:t>If OS owns the mailbox, then:</a:t>
             </a:r>
           </a:p>
           <a:p>
-            <a:endParaRPr lang="en-IN" sz="2400" dirty="0"/>
+            <a:endParaRPr lang="en-IN" sz="2400" dirty="0">
+              <a:highlight>
+                <a:srgbClr val="FFFF00"/>
+              </a:highlight>
+            </a:endParaRPr>
           </a:p>
           <a:p>
             <a:pPr lvl="1"/>
             <a:r>
-              <a:rPr lang="en-IN" sz="2400" dirty="0"/>
+              <a:rPr lang="en-IN" sz="2400" dirty="0">
+                <a:highlight>
+                  <a:srgbClr val="FFFF00"/>
+                </a:highlight>
+              </a:rPr>
               <a:t>    It is independent process, not attached to a process.</a:t>
             </a:r>
           </a:p>
           <a:p>
             <a:pPr lvl="1"/>
             <a:r>
-              <a:rPr lang="en-IN" sz="2400" dirty="0"/>
+              <a:rPr lang="en-IN" sz="2400" dirty="0">
+                <a:highlight>
+                  <a:srgbClr val="FFFF00"/>
+                </a:highlight>
+              </a:rPr>
               <a:t>    Then the OS must allow the process to:</a:t>
             </a:r>
           </a:p>
           <a:p>
-            <a:endParaRPr lang="en-IN" sz="2400" dirty="0"/>
+            <a:endParaRPr lang="en-IN" sz="2400" dirty="0">
+              <a:highlight>
+                <a:srgbClr val="FFFF00"/>
+              </a:highlight>
+            </a:endParaRPr>
           </a:p>
           <a:p>
             <a:pPr marL="857250" lvl="1" indent="-457200">
@@ -21639,7 +22763,11 @@
               <a:buAutoNum type="arabicParenR"/>
             </a:pPr>
             <a:r>
-              <a:rPr lang="en-IN" sz="2400" dirty="0"/>
+              <a:rPr lang="en-IN" sz="2400" dirty="0">
+                <a:highlight>
+                  <a:srgbClr val="FFFF00"/>
+                </a:highlight>
+              </a:rPr>
               <a:t>create a mailbox.</a:t>
             </a:r>
           </a:p>
@@ -21649,7 +22777,11 @@
               <a:buAutoNum type="arabicParenR"/>
             </a:pPr>
             <a:r>
-              <a:rPr lang="en-IN" sz="2400" dirty="0"/>
+              <a:rPr lang="en-IN" sz="2400" dirty="0">
+                <a:highlight>
+                  <a:srgbClr val="FFFF00"/>
+                </a:highlight>
+              </a:rPr>
               <a:t>send and receive messages through mailbox.</a:t>
             </a:r>
           </a:p>
@@ -21659,7 +22791,11 @@
               <a:buAutoNum type="arabicParenR"/>
             </a:pPr>
             <a:r>
-              <a:rPr lang="en-IN" sz="2400" dirty="0"/>
+              <a:rPr lang="en-IN" sz="2400" dirty="0">
+                <a:highlight>
+                  <a:srgbClr val="FFFF00"/>
+                </a:highlight>
+              </a:rPr>
               <a:t>delete the mailbox.</a:t>
             </a:r>
           </a:p>
@@ -21682,7 +22818,7 @@
           <a:p>
             <a:fld id="{7A19F3F8-808E-459C-9D62-E11F4ECD8F63}" type="datetime1">
               <a:rPr lang="en-IN" smtClean="0"/>
-              <a:t>23-04-2025</a:t>
+              <a:t>26-04-2025</a:t>
             </a:fld>
             <a:endParaRPr lang="en-IN"/>
           </a:p>
@@ -21788,29 +22924,49 @@
             <a:pPr marL="0" indent="0">
               <a:buNone/>
             </a:pPr>
-            <a:endParaRPr lang="en-IN" sz="2400" dirty="0"/>
+            <a:endParaRPr lang="en-IN" sz="2400" dirty="0">
+              <a:highlight>
+                <a:srgbClr val="FFFF00"/>
+              </a:highlight>
+            </a:endParaRPr>
           </a:p>
           <a:p>
             <a:pPr lvl="1"/>
             <a:r>
-              <a:rPr lang="en-IN" sz="2400" dirty="0"/>
+              <a:rPr lang="en-IN" sz="2400" dirty="0">
+                <a:highlight>
+                  <a:srgbClr val="FFFF00"/>
+                </a:highlight>
+              </a:rPr>
               <a:t> Process becomes the owner of new mailbox by default.</a:t>
             </a:r>
           </a:p>
           <a:p>
             <a:pPr lvl="1"/>
             <a:r>
-              <a:rPr lang="en-IN" sz="2400" dirty="0"/>
+              <a:rPr lang="en-IN" sz="2400" dirty="0">
+                <a:highlight>
+                  <a:srgbClr val="FFFF00"/>
+                </a:highlight>
+              </a:rPr>
               <a:t> Owner process can only receive messages through this mailbox.</a:t>
             </a:r>
           </a:p>
           <a:p>
             <a:pPr lvl="1"/>
             <a:r>
-              <a:rPr lang="en-IN" sz="2400" dirty="0"/>
+              <a:rPr lang="en-IN" sz="2400" dirty="0">
+                <a:highlight>
+                  <a:srgbClr val="FFFF00"/>
+                </a:highlight>
+              </a:rPr>
               <a:t> Ownership and receiving privileges can be passed using system calls to other processes. This will result in multiple receivers for each mailbox.</a:t>
             </a:r>
-            <a:endParaRPr lang="en-IN" sz="3200" dirty="0"/>
+            <a:endParaRPr lang="en-IN" sz="3200" dirty="0">
+              <a:highlight>
+                <a:srgbClr val="FFFF00"/>
+              </a:highlight>
+            </a:endParaRPr>
           </a:p>
         </p:txBody>
       </p:sp>
@@ -21850,7 +23006,7 @@
           <a:p>
             <a:fld id="{26C7273F-C5B7-4D40-8582-7006EB42B101}" type="datetime1">
               <a:rPr lang="en-IN" smtClean="0"/>
-              <a:t>23-04-2025</a:t>
+              <a:t>26-04-2025</a:t>
             </a:fld>
             <a:endParaRPr lang="en-IN"/>
           </a:p>
@@ -21989,7 +23145,7 @@
           <a:p>
             <a:fld id="{FDC4E822-3F60-4AF5-A2C7-5CC07F953596}" type="datetime1">
               <a:rPr lang="en-IN" smtClean="0"/>
-              <a:t>23-04-2025</a:t>
+              <a:t>26-04-2025</a:t>
             </a:fld>
             <a:endParaRPr lang="en-IN"/>
           </a:p>
@@ -22145,7 +23301,7 @@
           <a:p>
             <a:fld id="{4A86686D-1695-46FD-B0F3-01F3E83F89C0}" type="datetime1">
               <a:rPr lang="en-IN" smtClean="0"/>
-              <a:t>23-04-2025</a:t>
+              <a:t>26-04-2025</a:t>
             </a:fld>
             <a:endParaRPr lang="en-IN"/>
           </a:p>
@@ -22273,14 +23429,22 @@
           <a:p>
             <a:pPr lvl="1"/>
             <a:r>
-              <a:rPr lang="en-IN" sz="2400" dirty="0"/>
+              <a:rPr lang="en-IN" sz="2400" dirty="0">
+                <a:highlight>
+                  <a:srgbClr val="FFFF00"/>
+                </a:highlight>
+              </a:rPr>
               <a:t>Blocking/synchronous or </a:t>
             </a:r>
           </a:p>
           <a:p>
             <a:pPr lvl="1"/>
             <a:r>
-              <a:rPr lang="en-IN" sz="2400" dirty="0"/>
+              <a:rPr lang="en-IN" sz="2400" dirty="0">
+                <a:highlight>
+                  <a:srgbClr val="FFFF00"/>
+                </a:highlight>
+              </a:rPr>
               <a:t>non blocking/ asynchronous</a:t>
             </a:r>
           </a:p>
@@ -22303,7 +23467,7 @@
           <a:p>
             <a:fld id="{4A86686D-1695-46FD-B0F3-01F3E83F89C0}" type="datetime1">
               <a:rPr lang="en-IN" smtClean="0"/>
-              <a:t>23-04-2025</a:t>
+              <a:t>26-04-2025</a:t>
             </a:fld>
             <a:endParaRPr lang="en-IN"/>
           </a:p>
@@ -22479,7 +23643,7 @@
           <a:p>
             <a:fld id="{88C20114-8050-4880-8A58-B417723C4FAE}" type="datetime1">
               <a:rPr lang="en-IN" smtClean="0"/>
-              <a:t>23-04-2025</a:t>
+              <a:t>26-04-2025</a:t>
             </a:fld>
             <a:endParaRPr lang="en-IN"/>
           </a:p>
@@ -22614,53 +23778,85 @@
           <a:lstStyle/>
           <a:p>
             <a:r>
-              <a:rPr lang="en-IN" sz="2800" dirty="0"/>
+              <a:rPr lang="en-IN" sz="2800" dirty="0">
+                <a:highlight>
+                  <a:srgbClr val="FFFF00"/>
+                </a:highlight>
+              </a:rPr>
               <a:t>Blocking send</a:t>
             </a:r>
           </a:p>
           <a:p>
             <a:pPr lvl="1"/>
             <a:r>
-              <a:rPr lang="en-IN" sz="2400" dirty="0"/>
+              <a:rPr lang="en-IN" sz="2400" dirty="0">
+                <a:highlight>
+                  <a:srgbClr val="FFFF00"/>
+                </a:highlight>
+              </a:rPr>
               <a:t>The sending process is blocked until the message is received by the receiving process or by the mailbox.</a:t>
             </a:r>
           </a:p>
           <a:p>
             <a:r>
-              <a:rPr lang="en-IN" sz="2800" dirty="0"/>
+              <a:rPr lang="en-IN" sz="2800" dirty="0">
+                <a:highlight>
+                  <a:srgbClr val="FFFF00"/>
+                </a:highlight>
+              </a:rPr>
               <a:t>Non blocking send</a:t>
             </a:r>
           </a:p>
           <a:p>
             <a:pPr lvl="1"/>
             <a:r>
-              <a:rPr lang="en-IN" sz="2400" dirty="0"/>
+              <a:rPr lang="en-IN" sz="2400" dirty="0">
+                <a:highlight>
+                  <a:srgbClr val="FFFF00"/>
+                </a:highlight>
+              </a:rPr>
               <a:t> The sending process sends the message and resumes operation.</a:t>
             </a:r>
           </a:p>
           <a:p>
             <a:r>
-              <a:rPr lang="en-IN" sz="2800" dirty="0"/>
+              <a:rPr lang="en-IN" sz="2800" dirty="0">
+                <a:highlight>
+                  <a:srgbClr val="FFFF00"/>
+                </a:highlight>
+              </a:rPr>
               <a:t>Blocking receive</a:t>
             </a:r>
           </a:p>
           <a:p>
             <a:pPr lvl="1"/>
             <a:r>
-              <a:rPr lang="en-IN" sz="2400" dirty="0"/>
+              <a:rPr lang="en-IN" sz="2400" dirty="0">
+                <a:highlight>
+                  <a:srgbClr val="FFFF00"/>
+                </a:highlight>
+              </a:rPr>
               <a:t> The receiver blocks until a message is available.</a:t>
             </a:r>
           </a:p>
           <a:p>
             <a:r>
-              <a:rPr lang="en-IN" sz="2800" dirty="0"/>
+              <a:rPr lang="en-IN" sz="2800" dirty="0">
+                <a:highlight>
+                  <a:srgbClr val="FFFF00"/>
+                </a:highlight>
+              </a:rPr>
               <a:t>Non blocking receive</a:t>
             </a:r>
           </a:p>
           <a:p>
             <a:pPr lvl="1"/>
             <a:r>
-              <a:rPr lang="en-IN" sz="2400" dirty="0"/>
+              <a:rPr lang="en-IN" sz="2400" dirty="0">
+                <a:highlight>
+                  <a:srgbClr val="FFFF00"/>
+                </a:highlight>
+              </a:rPr>
               <a:t> The receiver retrieves either a valid message or a null.</a:t>
             </a:r>
           </a:p>
@@ -22683,7 +23879,7 @@
           <a:p>
             <a:fld id="{88C20114-8050-4880-8A58-B417723C4FAE}" type="datetime1">
               <a:rPr lang="en-IN" smtClean="0"/>
-              <a:t>23-04-2025</a:t>
+              <a:t>26-04-2025</a:t>
             </a:fld>
             <a:endParaRPr lang="en-IN"/>
           </a:p>
@@ -23216,7 +24412,11 @@
           <a:lstStyle/>
           <a:p>
             <a:r>
-              <a:rPr lang="en-US" altLang="en-US" sz="2800" dirty="0"/>
+              <a:rPr lang="en-US" altLang="en-US" sz="2800" dirty="0">
+                <a:highlight>
+                  <a:srgbClr val="FFFF00"/>
+                </a:highlight>
+              </a:rPr>
               <a:t>Cooperating processes need </a:t>
             </a:r>
             <a:r>
@@ -23224,6 +24424,9 @@
                 <a:solidFill>
                   <a:srgbClr val="3366FF"/>
                 </a:solidFill>
+                <a:highlight>
+                  <a:srgbClr val="FFFF00"/>
+                </a:highlight>
               </a:rPr>
               <a:t>interprocess</a:t>
             </a:r>
@@ -23232,11 +24435,18 @@
                 <a:solidFill>
                   <a:srgbClr val="3366FF"/>
                 </a:solidFill>
+                <a:highlight>
+                  <a:srgbClr val="FFFF00"/>
+                </a:highlight>
               </a:rPr>
               <a:t> communication </a:t>
             </a:r>
             <a:r>
-              <a:rPr lang="en-US" altLang="en-US" sz="2800" dirty="0"/>
+              <a:rPr lang="en-US" altLang="en-US" sz="2800" dirty="0">
+                <a:highlight>
+                  <a:srgbClr val="FFFF00"/>
+                </a:highlight>
+              </a:rPr>
               <a:t>(</a:t>
             </a:r>
             <a:r>
@@ -23244,11 +24454,18 @@
                 <a:solidFill>
                   <a:srgbClr val="3366FF"/>
                 </a:solidFill>
+                <a:highlight>
+                  <a:srgbClr val="FFFF00"/>
+                </a:highlight>
               </a:rPr>
               <a:t>IPC</a:t>
             </a:r>
             <a:r>
-              <a:rPr lang="en-US" altLang="en-US" sz="2800" dirty="0"/>
+              <a:rPr lang="en-US" altLang="en-US" sz="2800" dirty="0">
+                <a:highlight>
+                  <a:srgbClr val="FFFF00"/>
+                </a:highlight>
+              </a:rPr>
               <a:t>) mechanism to exchange data and information</a:t>
             </a:r>
           </a:p>
@@ -23319,7 +24536,7 @@
           <a:p>
             <a:fld id="{0664C4DB-B726-406A-AFE1-A4B576FA0C24}" type="datetime1">
               <a:rPr lang="en-IN" smtClean="0"/>
-              <a:t>23-04-2025</a:t>
+              <a:t>26-04-2025</a:t>
             </a:fld>
             <a:endParaRPr lang="en-IN"/>
           </a:p>
@@ -23440,30 +24657,50 @@
           <a:lstStyle/>
           <a:p>
             <a:r>
-              <a:rPr lang="en-IN" sz="2800" dirty="0"/>
+              <a:rPr lang="en-IN" sz="2800" dirty="0">
+                <a:highlight>
+                  <a:srgbClr val="FFFF00"/>
+                </a:highlight>
+              </a:rPr>
               <a:t>When both send() and receive() are blocking, </a:t>
             </a:r>
           </a:p>
           <a:p>
             <a:pPr lvl="1"/>
             <a:r>
-              <a:rPr lang="en-IN" dirty="0"/>
+              <a:rPr lang="en-IN" dirty="0">
+                <a:highlight>
+                  <a:srgbClr val="FFFF00"/>
+                </a:highlight>
+              </a:rPr>
               <a:t>Rendezvous between the sender and the receiver. </a:t>
             </a:r>
           </a:p>
           <a:p>
-            <a:endParaRPr lang="en-IN" sz="2800" dirty="0"/>
-          </a:p>
-          <a:p>
-            <a:r>
-              <a:rPr lang="en-IN" sz="2800" dirty="0"/>
+            <a:endParaRPr lang="en-IN" sz="2800" dirty="0">
+              <a:highlight>
+                <a:srgbClr val="FFFF00"/>
+              </a:highlight>
+            </a:endParaRPr>
+          </a:p>
+          <a:p>
+            <a:r>
+              <a:rPr lang="en-IN" sz="2800" dirty="0">
+                <a:highlight>
+                  <a:srgbClr val="FFFF00"/>
+                </a:highlight>
+              </a:rPr>
               <a:t>The solution to the producer-consumer problem becomes trivial –</a:t>
             </a:r>
           </a:p>
           <a:p>
             <a:pPr lvl="1"/>
             <a:r>
-              <a:rPr lang="en-IN" dirty="0"/>
+              <a:rPr lang="en-IN" dirty="0">
+                <a:highlight>
+                  <a:srgbClr val="FFFF00"/>
+                </a:highlight>
+              </a:rPr>
               <a:t> use blocking send() and receive()</a:t>
             </a:r>
           </a:p>
@@ -23486,7 +24723,7 @@
           <a:p>
             <a:fld id="{9A4D3DFC-B49D-432C-A8BC-D90695D5DFCD}" type="datetime1">
               <a:rPr lang="en-IN" smtClean="0"/>
-              <a:t>23-04-2025</a:t>
+              <a:t>26-04-2025</a:t>
             </a:fld>
             <a:endParaRPr lang="en-IN"/>
           </a:p>
@@ -23623,37 +24860,61 @@
           <a:lstStyle/>
           <a:p>
             <a:r>
-              <a:rPr lang="en-IN" dirty="0"/>
+              <a:rPr lang="en-IN" dirty="0">
+                <a:highlight>
+                  <a:srgbClr val="FFFF00"/>
+                </a:highlight>
+              </a:rPr>
               <a:t>Producer invokes </a:t>
             </a:r>
           </a:p>
           <a:p>
             <a:pPr lvl="1"/>
             <a:r>
-              <a:rPr lang="en-IN" dirty="0"/>
+              <a:rPr lang="en-IN" dirty="0">
+                <a:highlight>
+                  <a:srgbClr val="FFFF00"/>
+                </a:highlight>
+              </a:rPr>
               <a:t>the blocking send() call and </a:t>
             </a:r>
           </a:p>
           <a:p>
             <a:pPr lvl="1"/>
             <a:r>
-              <a:rPr lang="en-IN" dirty="0"/>
+              <a:rPr lang="en-IN" dirty="0">
+                <a:highlight>
+                  <a:srgbClr val="FFFF00"/>
+                </a:highlight>
+              </a:rPr>
               <a:t>waits until the message is delivered to either the receiver or the mailbox. </a:t>
             </a:r>
           </a:p>
           <a:p>
-            <a:endParaRPr lang="en-IN" dirty="0"/>
-          </a:p>
-          <a:p>
-            <a:r>
-              <a:rPr lang="en-IN" dirty="0"/>
+            <a:endParaRPr lang="en-IN" dirty="0">
+              <a:highlight>
+                <a:srgbClr val="FFFF00"/>
+              </a:highlight>
+            </a:endParaRPr>
+          </a:p>
+          <a:p>
+            <a:r>
+              <a:rPr lang="en-IN" dirty="0">
+                <a:highlight>
+                  <a:srgbClr val="FFFF00"/>
+                </a:highlight>
+              </a:rPr>
               <a:t>Consumer invokes </a:t>
             </a:r>
           </a:p>
           <a:p>
             <a:pPr lvl="1"/>
             <a:r>
-              <a:rPr lang="en-IN" dirty="0"/>
+              <a:rPr lang="en-IN" dirty="0">
+                <a:highlight>
+                  <a:srgbClr val="FFFF00"/>
+                </a:highlight>
+              </a:rPr>
               <a:t>receive(), it blocks until a message is available.</a:t>
             </a:r>
           </a:p>
@@ -23676,7 +24937,7 @@
           <a:p>
             <a:fld id="{8B07E54A-EA89-4112-A3DD-FAC379EA6F40}" type="datetime1">
               <a:rPr lang="en-IN" smtClean="0"/>
-              <a:t>23-04-2025</a:t>
+              <a:t>26-04-2025</a:t>
             </a:fld>
             <a:endParaRPr lang="en-IN"/>
           </a:p>
@@ -23809,7 +25070,11 @@
           <a:p>
             <a:pPr lvl="1"/>
             <a:r>
-              <a:rPr lang="en-IN" dirty="0"/>
+              <a:rPr lang="en-IN" dirty="0">
+                <a:highlight>
+                  <a:srgbClr val="FFFF00"/>
+                </a:highlight>
+              </a:rPr>
               <a:t>reside in a temporary queue. </a:t>
             </a:r>
           </a:p>
@@ -23836,7 +25101,7 @@
           <a:p>
             <a:fld id="{435C4CB3-50D1-4338-9000-8B1C4E6352AF}" type="datetime1">
               <a:rPr lang="en-IN" smtClean="0"/>
-              <a:t>23-04-2025</a:t>
+              <a:t>26-04-2025</a:t>
             </a:fld>
             <a:endParaRPr lang="en-IN"/>
           </a:p>
@@ -24022,7 +25287,7 @@
           <a:p>
             <a:fld id="{EFF4913C-B43D-4EFC-A88E-F273CA9182C9}" type="datetime1">
               <a:rPr lang="en-IN" smtClean="0"/>
-              <a:t>23-04-2025</a:t>
+              <a:t>26-04-2025</a:t>
             </a:fld>
             <a:endParaRPr lang="en-IN"/>
           </a:p>
@@ -24143,36 +25408,60 @@
           <a:lstStyle/>
           <a:p>
             <a:r>
-              <a:rPr lang="en-IN" sz="2800" dirty="0"/>
+              <a:rPr lang="en-IN" sz="2800" dirty="0">
+                <a:highlight>
+                  <a:srgbClr val="FFFF00"/>
+                </a:highlight>
+              </a:rPr>
               <a:t>Zero capacity</a:t>
             </a:r>
           </a:p>
           <a:p>
             <a:pPr lvl="1"/>
             <a:r>
-              <a:rPr lang="en-IN" dirty="0"/>
+              <a:rPr lang="en-IN" dirty="0">
+                <a:highlight>
+                  <a:srgbClr val="FFFF00"/>
+                </a:highlight>
+              </a:rPr>
               <a:t>Maximum Queue Length=0</a:t>
             </a:r>
           </a:p>
           <a:p>
             <a:pPr lvl="1"/>
             <a:r>
-              <a:rPr lang="en-IN" dirty="0"/>
+              <a:rPr lang="en-IN" dirty="0">
+                <a:highlight>
+                  <a:srgbClr val="FFFF00"/>
+                </a:highlight>
+              </a:rPr>
               <a:t>The link cannot have any messages waiting in it. </a:t>
             </a:r>
           </a:p>
           <a:p>
             <a:pPr lvl="1"/>
             <a:r>
-              <a:rPr lang="en-IN" dirty="0"/>
+              <a:rPr lang="en-IN" dirty="0">
+                <a:highlight>
+                  <a:srgbClr val="FFFF00"/>
+                </a:highlight>
+              </a:rPr>
               <a:t>The sender must block until the recipient receives the message.</a:t>
             </a:r>
           </a:p>
           <a:p>
-            <a:endParaRPr lang="en-IN" dirty="0"/>
-          </a:p>
-          <a:p>
-            <a:endParaRPr lang="en-IN" dirty="0"/>
+            <a:endParaRPr lang="en-IN" dirty="0">
+              <a:highlight>
+                <a:srgbClr val="FFFF00"/>
+              </a:highlight>
+            </a:endParaRPr>
+          </a:p>
+          <a:p>
+            <a:endParaRPr lang="en-IN" dirty="0">
+              <a:highlight>
+                <a:srgbClr val="FFFF00"/>
+              </a:highlight>
+            </a:endParaRPr>
           </a:p>
         </p:txBody>
       </p:sp>
@@ -24193,7 +25482,7 @@
           <a:p>
             <a:fld id="{941DDF40-D7F4-4AF7-A2D0-95F253856ADF}" type="datetime1">
               <a:rPr lang="en-IN" smtClean="0"/>
-              <a:t>23-04-2025</a:t>
+              <a:t>26-04-2025</a:t>
             </a:fld>
             <a:endParaRPr lang="en-IN"/>
           </a:p>
@@ -24319,40 +25608,68 @@
           <a:lstStyle/>
           <a:p>
             <a:r>
-              <a:rPr lang="en-IN" sz="2800" dirty="0"/>
+              <a:rPr lang="en-IN" sz="2800" dirty="0">
+                <a:highlight>
+                  <a:srgbClr val="FFFF00"/>
+                </a:highlight>
+              </a:rPr>
               <a:t>Bounded capacity</a:t>
             </a:r>
           </a:p>
           <a:p>
             <a:pPr lvl="1"/>
             <a:r>
-              <a:rPr lang="en-IN" dirty="0"/>
+              <a:rPr lang="en-IN" dirty="0">
+                <a:highlight>
+                  <a:srgbClr val="FFFF00"/>
+                </a:highlight>
+              </a:rPr>
               <a:t>Queue has finite length </a:t>
             </a:r>
             <a:r>
-              <a:rPr lang="en-IN" i="1" dirty="0"/>
+              <a:rPr lang="en-IN" i="1" dirty="0">
+                <a:highlight>
+                  <a:srgbClr val="FFFF00"/>
+                </a:highlight>
+              </a:rPr>
               <a:t>n; </a:t>
             </a:r>
           </a:p>
           <a:p>
             <a:pPr lvl="1"/>
             <a:r>
-              <a:rPr lang="en-IN" dirty="0"/>
+              <a:rPr lang="en-IN" dirty="0">
+                <a:highlight>
+                  <a:srgbClr val="FFFF00"/>
+                </a:highlight>
+              </a:rPr>
               <a:t>At most </a:t>
             </a:r>
             <a:r>
-              <a:rPr lang="en-IN" i="1" dirty="0"/>
+              <a:rPr lang="en-IN" i="1" dirty="0">
+                <a:highlight>
+                  <a:srgbClr val="FFFF00"/>
+                </a:highlight>
+              </a:rPr>
               <a:t>n </a:t>
             </a:r>
             <a:r>
-              <a:rPr lang="en-IN" dirty="0"/>
+              <a:rPr lang="en-IN" dirty="0">
+                <a:highlight>
+                  <a:srgbClr val="FFFF00"/>
+                </a:highlight>
+              </a:rPr>
               <a:t>messages can reside in it. </a:t>
             </a:r>
           </a:p>
           <a:p>
             <a:pPr lvl="1"/>
             <a:r>
-              <a:rPr lang="en-IN" dirty="0"/>
+              <a:rPr lang="en-IN" dirty="0">
+                <a:highlight>
+                  <a:srgbClr val="FFFF00"/>
+                </a:highlight>
+              </a:rPr>
               <a:t>The link's capacity is finite.</a:t>
             </a:r>
           </a:p>
@@ -24375,7 +25692,7 @@
           <a:p>
             <a:fld id="{6C08CDEB-7348-473B-AB12-98F4EA0543AB}" type="datetime1">
               <a:rPr lang="en-IN" smtClean="0"/>
-              <a:t>23-04-2025</a:t>
+              <a:t>26-04-2025</a:t>
             </a:fld>
             <a:endParaRPr lang="en-IN"/>
           </a:p>
@@ -24501,49 +25818,77 @@
           <a:lstStyle/>
           <a:p>
             <a:r>
-              <a:rPr lang="en-IN" sz="2400" dirty="0"/>
+              <a:rPr lang="en-IN" sz="2400" dirty="0">
+                <a:highlight>
+                  <a:srgbClr val="FFFF00"/>
+                </a:highlight>
+              </a:rPr>
               <a:t>Bounded capacity</a:t>
             </a:r>
           </a:p>
           <a:p>
             <a:pPr lvl="1"/>
             <a:r>
-              <a:rPr lang="en-IN" sz="2400" dirty="0"/>
+              <a:rPr lang="en-IN" sz="2400" dirty="0">
+                <a:highlight>
+                  <a:srgbClr val="FFFF00"/>
+                </a:highlight>
+              </a:rPr>
               <a:t>If the queue is not full </a:t>
             </a:r>
           </a:p>
           <a:p>
             <a:pPr lvl="2"/>
             <a:r>
-              <a:rPr lang="en-IN" dirty="0"/>
+              <a:rPr lang="en-IN" dirty="0">
+                <a:highlight>
+                  <a:srgbClr val="FFFF00"/>
+                </a:highlight>
+              </a:rPr>
               <a:t>the message is placed in the queue </a:t>
             </a:r>
           </a:p>
           <a:p>
             <a:pPr lvl="2"/>
             <a:r>
-              <a:rPr lang="en-IN" dirty="0"/>
+              <a:rPr lang="en-IN" dirty="0">
+                <a:highlight>
+                  <a:srgbClr val="FFFF00"/>
+                </a:highlight>
+              </a:rPr>
               <a:t>either the message is copied or a pointer to the message is kept </a:t>
             </a:r>
           </a:p>
           <a:p>
             <a:pPr lvl="2"/>
             <a:r>
-              <a:rPr lang="en-IN" dirty="0"/>
+              <a:rPr lang="en-IN" dirty="0">
+                <a:highlight>
+                  <a:srgbClr val="FFFF00"/>
+                </a:highlight>
+              </a:rPr>
               <a:t>the sender can continue execution without waiting. </a:t>
             </a:r>
           </a:p>
           <a:p>
             <a:pPr lvl="1"/>
             <a:r>
-              <a:rPr lang="en-IN" sz="2400" dirty="0"/>
+              <a:rPr lang="en-IN" sz="2400" dirty="0">
+                <a:highlight>
+                  <a:srgbClr val="FFFF00"/>
+                </a:highlight>
+              </a:rPr>
               <a:t>If the link is full, </a:t>
             </a:r>
           </a:p>
           <a:p>
             <a:pPr lvl="2"/>
             <a:r>
-              <a:rPr lang="en-IN" dirty="0"/>
+              <a:rPr lang="en-IN" dirty="0">
+                <a:highlight>
+                  <a:srgbClr val="FFFF00"/>
+                </a:highlight>
+              </a:rPr>
               <a:t>the sender must block until space is available in the queue.</a:t>
             </a:r>
           </a:p>
@@ -24566,7 +25911,7 @@
           <a:p>
             <a:fld id="{7EBE3E0D-3E00-4A98-B5A6-86893A0F9CB4}" type="datetime1">
               <a:rPr lang="en-IN" smtClean="0"/>
-              <a:t>23-04-2025</a:t>
+              <a:t>26-04-2025</a:t>
             </a:fld>
             <a:endParaRPr lang="en-IN"/>
           </a:p>
@@ -24687,28 +26032,44 @@
           <a:lstStyle/>
           <a:p>
             <a:r>
-              <a:rPr lang="en-IN" dirty="0"/>
+              <a:rPr lang="en-IN" dirty="0">
+                <a:highlight>
+                  <a:srgbClr val="FFFF00"/>
+                </a:highlight>
+              </a:rPr>
               <a:t>Unbounded capacity. </a:t>
             </a:r>
           </a:p>
           <a:p>
             <a:pPr lvl="1"/>
             <a:r>
-              <a:rPr lang="en-IN" dirty="0"/>
+              <a:rPr lang="en-IN" dirty="0">
+                <a:highlight>
+                  <a:srgbClr val="FFFF00"/>
+                </a:highlight>
+              </a:rPr>
               <a:t>The queue's length is potentially infinite; </a:t>
             </a:r>
           </a:p>
           <a:p>
             <a:pPr lvl="1"/>
             <a:r>
-              <a:rPr lang="en-IN" dirty="0"/>
+              <a:rPr lang="en-IN" dirty="0">
+                <a:highlight>
+                  <a:srgbClr val="FFFF00"/>
+                </a:highlight>
+              </a:rPr>
               <a:t>Any number of messages can wait in it. </a:t>
             </a:r>
           </a:p>
           <a:p>
             <a:pPr lvl="1"/>
             <a:r>
-              <a:rPr lang="en-IN" dirty="0"/>
+              <a:rPr lang="en-IN" dirty="0">
+                <a:highlight>
+                  <a:srgbClr val="FFFF00"/>
+                </a:highlight>
+              </a:rPr>
               <a:t>The sender never blocks. </a:t>
             </a:r>
           </a:p>
@@ -24731,7 +26092,7 @@
           <a:p>
             <a:fld id="{1FEEA3EE-6504-4297-8E01-1150D0F8A315}" type="datetime1">
               <a:rPr lang="en-IN" smtClean="0"/>
-              <a:t>23-04-2025</a:t>
+              <a:t>26-04-2025</a:t>
             </a:fld>
             <a:endParaRPr lang="en-IN"/>
           </a:p>
@@ -24858,8 +26219,32 @@
           </a:p>
           <a:p>
             <a:r>
+              <a:rPr lang="en-IN" sz="2800" dirty="0">
+                <a:highlight>
+                  <a:srgbClr val="FFFF00"/>
+                </a:highlight>
+              </a:rPr>
+              <a:t> </a:t>
+            </a:r>
+            <a:r>
+              <a:rPr lang="en-IN" sz="2800">
+                <a:highlight>
+                  <a:srgbClr val="FFFF00"/>
+                </a:highlight>
+              </a:rPr>
+              <a:t>kThe</a:t>
+            </a:r>
+            <a:r>
+              <a:rPr lang="en-IN" sz="2800" dirty="0">
+                <a:highlight>
+                  <a:srgbClr val="FFFF00"/>
+                </a:highlight>
+              </a:rPr>
+              <a:t> other cases =systems with automatic buffering</a:t>
+            </a:r>
+            <a:r>
               <a:rPr lang="en-IN" sz="2800" dirty="0"/>
-              <a:t>The other cases =systems with automatic buffering.</a:t>
+              <a:t>.</a:t>
             </a:r>
           </a:p>
         </p:txBody>
@@ -24881,7 +26266,7 @@
           <a:p>
             <a:fld id="{85BF3A94-B339-4983-9E42-4CC83ED08C11}" type="datetime1">
               <a:rPr lang="en-IN" smtClean="0"/>
-              <a:t>23-04-2025</a:t>
+              <a:t>26-04-2025</a:t>
             </a:fld>
             <a:endParaRPr lang="en-IN"/>
           </a:p>
@@ -25222,7 +26607,7 @@
           <a:p>
             <a:fld id="{427DCF21-CF67-444D-9FB5-D0E9A5DCE2A6}" type="datetime1">
               <a:rPr lang="en-IN" smtClean="0"/>
-              <a:t>23-04-2025</a:t>
+              <a:t>26-04-2025</a:t>
             </a:fld>
             <a:endParaRPr lang="en-IN"/>
           </a:p>
@@ -25362,14 +26747,22 @@
           <a:p>
             <a:pPr lvl="1"/>
             <a:r>
-              <a:rPr lang="en-IN" sz="2400" dirty="0"/>
+              <a:rPr lang="en-IN" sz="2400" dirty="0">
+                <a:highlight>
+                  <a:srgbClr val="FFFF00"/>
+                </a:highlight>
+              </a:rPr>
               <a:t>A region of memory that is shared by cooperating processes is established. </a:t>
             </a:r>
           </a:p>
           <a:p>
             <a:pPr lvl="1"/>
             <a:r>
-              <a:rPr lang="en-IN" sz="2400" dirty="0"/>
+              <a:rPr lang="en-IN" sz="2400" dirty="0">
+                <a:highlight>
+                  <a:srgbClr val="FFFF00"/>
+                </a:highlight>
+              </a:rPr>
               <a:t>Processes can then exchange information by reading and writing data to the shared region.</a:t>
             </a:r>
           </a:p>
@@ -25385,10 +26778,18 @@
           <a:p>
             <a:pPr lvl="1"/>
             <a:r>
-              <a:rPr lang="en-IN" sz="2400" dirty="0"/>
+              <a:rPr lang="en-IN" sz="2400" dirty="0">
+                <a:highlight>
+                  <a:srgbClr val="FFFF00"/>
+                </a:highlight>
+              </a:rPr>
               <a:t>communication takes place by means of messages exchanged between the cooperating processes.</a:t>
             </a:r>
-            <a:endParaRPr lang="en-US" altLang="en-US" sz="2400" dirty="0"/>
+            <a:endParaRPr lang="en-US" altLang="en-US" sz="2400" dirty="0">
+              <a:highlight>
+                <a:srgbClr val="FFFF00"/>
+              </a:highlight>
+            </a:endParaRPr>
           </a:p>
         </p:txBody>
       </p:sp>
@@ -25409,7 +26810,7 @@
           <a:p>
             <a:fld id="{CDF3215B-AC67-47DB-A84A-418509634AB3}" type="datetime1">
               <a:rPr lang="en-IN" smtClean="0"/>
-              <a:t>23-04-2025</a:t>
+              <a:t>26-04-2025</a:t>
             </a:fld>
             <a:endParaRPr lang="en-IN"/>
           </a:p>
